--- a/lecons/F5/16_F5_M1_L14_Globalisation.pptx
+++ b/lecons/F5/16_F5_M1_L14_Globalisation.pptx
@@ -57,9 +57,10 @@
     <p:sldId id="305" r:id="rId51"/>
     <p:sldId id="306" r:id="rId52"/>
     <p:sldId id="307" r:id="rId53"/>
+    <p:sldId id="308" r:id="rId54"/>
   </p:sldIdLst>
   <p:notesMasterIdLst>
-    <p:notesMasterId r:id="rId54"/>
+    <p:notesMasterId r:id="rId55"/>
   </p:notesMasterIdLst>
   <p:sldSz cx="12192000" cy="6858000"/>
   <p:notesSz cx="6858000" cy="12192000"/>
@@ -3281,7 +3282,7 @@
           <a:p>
             <a:r>
               <a:rPr lang="en-US" dirty="0"/>
-              <a:t>Let us copy Advantages and Disadvantages. Globalisation has the following advantages and disadvantages. On this slide we have Advantages and Disadvantages. Write each point on a new line, with the key term first, and explain it in your own words when we revise. When you finish, we go to the next slide.</a:t>
+              <a:t>Let us copy Advantages. Globalisation has the following advantages. On this slide we have Investment, Technology and Jobs and cheaper goods. Write each point on a new line, with the key term first, and explain it in your own words when we revise.</a:t>
             </a:r>
             <a:endParaRPr lang="en-US" dirty="0"/>
           </a:p>
@@ -3369,7 +3370,7 @@
           <a:p>
             <a:r>
               <a:rPr lang="en-US" dirty="0"/>
-              <a:t>We continue with Advantages and Disadvantages. On this slide we have Cultural effects. Write each point on a new line, with the key term first, and explain it in your own words when we revise.</a:t>
+              <a:t>Let us copy Disadvantages. Globalisation has the following disadvantages. On this slide we have Unfair competition and Unequal gains. Write each point on a new line, with the key term first, and explain it in your own words when we revise. When you finish, we go to the next slide.</a:t>
             </a:r>
             <a:endParaRPr lang="en-US" dirty="0"/>
           </a:p>
@@ -3545,7 +3546,7 @@
           <a:p>
             <a:r>
               <a:rPr lang="en-US" dirty="0"/>
-              <a:t>Now let us check what you have understood. Question 1: Define globalisation. Answer in your exercise book.</a:t>
+              <a:t>We continue with Disadvantages. On this slide we have Loss of culture. Write each point on a new line, with the key term first, and explain it in your own words when we revise.</a:t>
             </a:r>
             <a:endParaRPr lang="en-US" dirty="0"/>
           </a:p>
@@ -3633,7 +3634,7 @@
           <a:p>
             <a:r>
               <a:rPr lang="en-US" dirty="0"/>
-              <a:t>The expected answer is: growing links between countries through trade, technology and culture. If you got it right, well done.</a:t>
+              <a:t>Now let us check what you have understood. Question 1: Define globalisation. Answer in your exercise book.</a:t>
             </a:r>
             <a:endParaRPr lang="en-US" dirty="0"/>
           </a:p>
@@ -3721,7 +3722,7 @@
           <a:p>
             <a:r>
               <a:rPr lang="en-US" dirty="0"/>
-              <a:t>Now let us check what you have understood. Question 2: Give one advantage and one disadvantage. Answer in your exercise book.</a:t>
+              <a:t>The expected answer is: growing links between countries through trade, technology and culture. If you got it right, well done.</a:t>
             </a:r>
             <a:endParaRPr lang="en-US" dirty="0"/>
           </a:p>
@@ -3809,7 +3810,7 @@
           <a:p>
             <a:r>
               <a:rPr lang="en-US" dirty="0"/>
-              <a:t>The expected answer is: cheaper goods; unfair competition. If you got it right, well done.</a:t>
+              <a:t>Now let us check what you have understood. Question 2: Give one advantage and one disadvantage. Answer in your exercise book.</a:t>
             </a:r>
             <a:endParaRPr lang="en-US" dirty="0"/>
           </a:p>
@@ -3897,7 +3898,7 @@
           <a:p>
             <a:r>
               <a:rPr lang="en-US" dirty="0"/>
-              <a:t>Take your time to copy this part; we will continue together.</a:t>
+              <a:t>The expected answer is: cheaper goods; unfair competition. If you got it right, well done.</a:t>
             </a:r>
             <a:endParaRPr lang="en-US" dirty="0"/>
           </a:p>
@@ -3985,7 +3986,7 @@
           <a:p>
             <a:r>
               <a:rPr lang="en-US" dirty="0"/>
-              <a:t>For those who need more practice, fill in the blanks in your exercise book. The answers are: number 1, multinational; number 2, village; number 3, cultural.</a:t>
+              <a:t>Take your time to copy this part; we will continue together.</a:t>
             </a:r>
             <a:endParaRPr lang="en-US" dirty="0"/>
           </a:p>
@@ -4073,7 +4074,7 @@
           <a:p>
             <a:r>
               <a:rPr lang="en-US" dirty="0"/>
-              <a:t>For your homework: List five foreign products used in your home and their countries of origin. We shall correct it at the beginning of our next lesson.</a:t>
+              <a:t>For those who need more practice, fill in the blanks in your exercise book. The answers are: number 1, multinational; number 2, village; number 3, cultural.</a:t>
             </a:r>
             <a:endParaRPr lang="en-US" dirty="0"/>
           </a:p>
@@ -4161,7 +4162,7 @@
           <a:p>
             <a:r>
               <a:rPr lang="en-US" dirty="0"/>
-              <a:t>Our next lesson will be on Lesson 15: Telecommunication (Internet Communication). Thank you for your attention, and see you next time.</a:t>
+              <a:t>For your homework: List five foreign products used in your home and their countries of origin. We shall correct it at the beginning of our next lesson.</a:t>
             </a:r>
             <a:endParaRPr lang="en-US" dirty="0"/>
           </a:p>
@@ -4249,7 +4250,7 @@
           <a:p>
             <a:r>
               <a:rPr lang="en-US" dirty="0"/>
-              <a:t>Let us play the bilingual game. I say a word in English, and you give me the French word. Then we do the reverse.</a:t>
+              <a:t>Our next lesson will be on Lesson 15: Telecommunication (Internet Communication). Thank you for your attention, and see you next time.</a:t>
             </a:r>
             <a:endParaRPr lang="en-US" dirty="0"/>
           </a:p>
@@ -4337,7 +4338,7 @@
           <a:p>
             <a:r>
               <a:rPr lang="en-US" dirty="0"/>
-              <a:t>I record this information in the official logbook of the class after the lesson.</a:t>
+              <a:t>Let us play the bilingual game. I say a word in English, and you give me the French word. Then we do the reverse.</a:t>
             </a:r>
             <a:endParaRPr lang="en-US" dirty="0"/>
           </a:p>
@@ -4513,7 +4514,7 @@
           <a:p>
             <a:r>
               <a:rPr lang="en-US" dirty="0"/>
-              <a:t>I complete the second page of the logbook: the matter taught, the evaluation, the homework and the attendance.</a:t>
+              <a:t>I record this information in the official logbook of the class after the lesson.</a:t>
             </a:r>
             <a:endParaRPr lang="en-US" dirty="0"/>
           </a:p>
@@ -4601,7 +4602,7 @@
           <a:p>
             <a:r>
               <a:rPr lang="en-US" dirty="0"/>
-              <a:t>This slide is for me, the teacher: it gives the timing of the lesson and what to do if the projector is not available.</a:t>
+              <a:t>I complete the second page of the logbook: the matter taught, the evaluation, the homework and the attendance.</a:t>
             </a:r>
             <a:endParaRPr lang="en-US" dirty="0"/>
           </a:p>
@@ -4689,7 +4690,7 @@
           <a:p>
             <a:r>
               <a:rPr lang="en-US" dirty="0"/>
-              <a:t>These are the references and picture credits used to prepare this lesson.</a:t>
+              <a:t>This slide is for me, the teacher: it gives the timing of the lesson and what to do if the projector is not available.</a:t>
             </a:r>
             <a:endParaRPr lang="en-US" dirty="0"/>
           </a:p>
@@ -4713,6 +4714,94 @@
             <a:fld id="{F7021451-1387-4CA6-816F-3879F97B5CBC}" type="slidenum">
               <a:rPr lang="en-US"/>
               <a:t>52</a:t>
+            </a:fld>
+            <a:endParaRPr lang="en-US"/>
+          </a:p>
+        </p:txBody>
+      </p:sp>
+    </p:spTree>
+    <p:extLst>
+      <p:ext uri="{BB962C8B-B14F-4D97-AF65-F5344CB8AC3E}">
+        <p14:creationId xmlns:p14="http://schemas.microsoft.com/office/powerpoint/2010/main" val="1024086991"/>
+      </p:ext>
+    </p:extLst>
+  </p:cSld>
+  <p:clrMapOvr>
+    <a:masterClrMapping/>
+  </p:clrMapOvr>
+</p:notes>
+</file>
+
+<file path=ppt/notesSlides/notesSlide53.xml><?xml version="1.0" encoding="utf-8"?>
+<p:notes xmlns:a="http://schemas.openxmlformats.org/drawingml/2006/main" xmlns:r="http://schemas.openxmlformats.org/officeDocument/2006/relationships" xmlns:p="http://schemas.openxmlformats.org/presentationml/2006/main">
+  <p:cSld>
+    <p:spTree>
+      <p:nvGrpSpPr>
+        <p:cNvPr id="1" name=""/>
+        <p:cNvGrpSpPr/>
+        <p:nvPr/>
+      </p:nvGrpSpPr>
+      <p:grpSpPr>
+        <a:xfrm>
+          <a:off x="0" y="0"/>
+          <a:ext cx="0" cy="0"/>
+          <a:chOff x="0" y="0"/>
+          <a:chExt cx="0" cy="0"/>
+        </a:xfrm>
+      </p:grpSpPr>
+      <p:sp>
+        <p:nvSpPr>
+          <p:cNvPr id="2" name="Slide Image Placeholder 1"/>
+          <p:cNvSpPr>
+            <a:spLocks noGrp="1" noRot="1" noChangeAspect="1"/>
+          </p:cNvSpPr>
+          <p:nvPr>
+            <p:ph type="sldImg"/>
+          </p:nvPr>
+        </p:nvSpPr>
+        <p:spPr/>
+      </p:sp>
+      <p:sp>
+        <p:nvSpPr>
+          <p:cNvPr id="3" name="Notes Placeholder 2"/>
+          <p:cNvSpPr>
+            <a:spLocks noGrp="1"/>
+          </p:cNvSpPr>
+          <p:nvPr>
+            <p:ph type="body" idx="1"/>
+          </p:nvPr>
+        </p:nvSpPr>
+        <p:spPr/>
+        <p:txBody>
+          <a:bodyPr/>
+          <a:lstStyle/>
+          <a:p>
+            <a:r>
+              <a:rPr lang="en-US" dirty="0"/>
+              <a:t>These are the references and picture credits used to prepare this lesson.</a:t>
+            </a:r>
+            <a:endParaRPr lang="en-US" dirty="0"/>
+          </a:p>
+        </p:txBody>
+      </p:sp>
+      <p:sp>
+        <p:nvSpPr>
+          <p:cNvPr id="4" name="Slide Number Placeholder 3"/>
+          <p:cNvSpPr>
+            <a:spLocks noGrp="1"/>
+          </p:cNvSpPr>
+          <p:nvPr>
+            <p:ph type="sldNum" sz="quarter" idx="10"/>
+          </p:nvPr>
+        </p:nvSpPr>
+        <p:spPr/>
+        <p:txBody>
+          <a:bodyPr/>
+          <a:lstStyle/>
+          <a:p>
+            <a:fld id="{F7021451-1387-4CA6-816F-3879F97B5CBC}" type="slidenum">
+              <a:rPr lang="en-US"/>
+              <a:t>53</a:t>
             </a:fld>
             <a:endParaRPr lang="en-US"/>
           </a:p>
@@ -14332,7 +14421,7 @@
         <p:spPr>
           <a:xfrm>
             <a:off x="0" y="658368"/>
-            <a:ext cx="2468880" cy="5833872"/>
+            <a:ext cx="1463040" cy="5833872"/>
           </a:xfrm>
           <a:prstGeom prst="rect">
             <a:avLst/>
@@ -14347,8 +14436,8 @@
         </p:nvSpPr>
         <p:spPr>
           <a:xfrm>
-            <a:off x="2697480" y="1005840"/>
-            <a:ext cx="9174175" cy="731520"/>
+            <a:off x="1691640" y="1005840"/>
+            <a:ext cx="10180015" cy="731520"/>
           </a:xfrm>
           <a:prstGeom prst="rect">
             <a:avLst/>
@@ -14388,8 +14477,47 @@
         </p:nvSpPr>
         <p:spPr>
           <a:xfrm>
-            <a:off x="2697480" y="1783080"/>
-            <a:ext cx="9174175" cy="4663440"/>
+            <a:off x="1691640" y="1737360"/>
+            <a:ext cx="10180015" cy="457200"/>
+          </a:xfrm>
+          <a:prstGeom prst="rect">
+            <a:avLst/>
+          </a:prstGeom>
+          <a:noFill/>
+          <a:ln/>
+        </p:spPr>
+        <p:txBody>
+          <a:bodyPr wrap="square" lIns="0" tIns="0" rIns="0" bIns="0" rtlCol="0" anchor="ctr"/>
+          <a:lstStyle/>
+          <a:p>
+            <a:pPr algn="l" indent="0" marL="0">
+              <a:buNone/>
+            </a:pPr>
+            <a:r>
+              <a:rPr lang="en-US" sz="3200" b="1" dirty="0">
+                <a:solidFill>
+                  <a:srgbClr val="990011"/>
+                </a:solidFill>
+                <a:latin typeface="Times New Roman" pitchFamily="34" charset="0"/>
+                <a:ea typeface="Times New Roman" pitchFamily="34" charset="-122"/>
+                <a:cs typeface="Times New Roman" pitchFamily="34" charset="-120"/>
+              </a:rPr>
+              <a:t>A) Advantages</a:t>
+            </a:r>
+            <a:endParaRPr lang="en-US" sz="3200" dirty="0"/>
+          </a:p>
+        </p:txBody>
+      </p:sp>
+      <p:sp>
+        <p:nvSpPr>
+          <p:cNvPr id="6" name="Text 3"/>
+          <p:cNvSpPr/>
+          <p:nvPr/>
+        </p:nvSpPr>
+        <p:spPr>
+          <a:xfrm>
+            <a:off x="1691640" y="2240280"/>
+            <a:ext cx="10180015" cy="4206240"/>
           </a:xfrm>
           <a:prstGeom prst="rect">
             <a:avLst/>
@@ -14416,7 +14544,7 @@
                 <a:ea typeface="Times New Roman" pitchFamily="34" charset="-122"/>
                 <a:cs typeface="Times New Roman" pitchFamily="34" charset="-120"/>
               </a:rPr>
-              <a:t>Globalisation has the following advantages and disadvantages:</a:t>
+              <a:t>Globalisation has the following advantages:</a:t>
             </a:r>
             <a:endParaRPr lang="en-US" sz="4000" dirty="0"/>
           </a:p>
@@ -14436,7 +14564,7 @@
                 <a:ea typeface="Times New Roman" pitchFamily="34" charset="-122"/>
                 <a:cs typeface="Times New Roman" pitchFamily="34" charset="-120"/>
               </a:rPr>
-              <a:t>Advantages: </a:t>
+              <a:t>Investment: </a:t>
             </a:r>
             <a:pPr algn="l" indent="0" marL="0">
               <a:spcAft>
@@ -14453,7 +14581,7 @@
                 <a:ea typeface="Times New Roman" pitchFamily="34" charset="-122"/>
                 <a:cs typeface="Times New Roman" pitchFamily="34" charset="-120"/>
               </a:rPr>
-              <a:t>It brings investment, technology, jobs and cheaper goods.</a:t>
+              <a:t>Foreign firms build factories.</a:t>
             </a:r>
             <a:endParaRPr lang="en-US" sz="4000" dirty="0"/>
           </a:p>
@@ -14473,7 +14601,7 @@
                 <a:ea typeface="Times New Roman" pitchFamily="34" charset="-122"/>
                 <a:cs typeface="Times New Roman" pitchFamily="34" charset="-120"/>
               </a:rPr>
-              <a:t>Disadvantages: </a:t>
+              <a:t>Technology: </a:t>
             </a:r>
             <a:pPr algn="l" indent="0" marL="0">
               <a:spcAft>
@@ -14490,7 +14618,44 @@
                 <a:ea typeface="Times New Roman" pitchFamily="34" charset="-122"/>
                 <a:cs typeface="Times New Roman" pitchFamily="34" charset="-120"/>
               </a:rPr>
-              <a:t>Local industries face unfair competition and rich countries gain most.</a:t>
+              <a:t>New machines and methods spread.</a:t>
+            </a:r>
+            <a:endParaRPr lang="en-US" sz="4000" dirty="0"/>
+          </a:p>
+          <a:p>
+            <a:pPr algn="l" indent="0" marL="0">
+              <a:spcAft>
+                <a:spcPts val="800"/>
+              </a:spcAft>
+              <a:buNone/>
+            </a:pPr>
+            <a:r>
+              <a:rPr lang="en-US" sz="4000" b="1" dirty="0">
+                <a:solidFill>
+                  <a:srgbClr val="111111"/>
+                </a:solidFill>
+                <a:latin typeface="Times New Roman" pitchFamily="34" charset="0"/>
+                <a:ea typeface="Times New Roman" pitchFamily="34" charset="-122"/>
+                <a:cs typeface="Times New Roman" pitchFamily="34" charset="-120"/>
+              </a:rPr>
+              <a:t>Jobs and cheaper goods: </a:t>
+            </a:r>
+            <a:pPr algn="l" indent="0" marL="0">
+              <a:spcAft>
+                <a:spcPts val="800"/>
+              </a:spcAft>
+              <a:buNone/>
+            </a:pPr>
+            <a:r>
+              <a:rPr lang="en-US" sz="4000" dirty="0">
+                <a:solidFill>
+                  <a:srgbClr val="111111"/>
+                </a:solidFill>
+                <a:latin typeface="Times New Roman" pitchFamily="34" charset="0"/>
+                <a:ea typeface="Times New Roman" pitchFamily="34" charset="-122"/>
+                <a:cs typeface="Times New Roman" pitchFamily="34" charset="-120"/>
+              </a:rPr>
+              <a:t>People find work and buy cheaper products.</a:t>
             </a:r>
             <a:endParaRPr lang="en-US" sz="4000" dirty="0"/>
           </a:p>
@@ -14625,7 +14790,7 @@
         <p:spPr>
           <a:xfrm>
             <a:off x="0" y="658368"/>
-            <a:ext cx="5120640" cy="5833872"/>
+            <a:ext cx="2468880" cy="5833872"/>
           </a:xfrm>
           <a:prstGeom prst="rect">
             <a:avLst/>
@@ -14640,8 +14805,8 @@
         </p:nvSpPr>
         <p:spPr>
           <a:xfrm>
-            <a:off x="5349240" y="1005840"/>
-            <a:ext cx="6522415" cy="731520"/>
+            <a:off x="2697480" y="1005840"/>
+            <a:ext cx="9174175" cy="731520"/>
           </a:xfrm>
           <a:prstGeom prst="rect">
             <a:avLst/>
@@ -14667,7 +14832,7 @@
                 <a:ea typeface="Times New Roman" pitchFamily="34" charset="-122"/>
                 <a:cs typeface="Times New Roman" pitchFamily="34" charset="-120"/>
               </a:rPr>
-              <a:t>2. Advantages and Disadvantages (continued)</a:t>
+              <a:t>2. Advantages and Disadvantages</a:t>
             </a:r>
             <a:endParaRPr lang="en-US" sz="3600" dirty="0"/>
           </a:p>
@@ -14681,8 +14846,47 @@
         </p:nvSpPr>
         <p:spPr>
           <a:xfrm>
-            <a:off x="5349240" y="1783080"/>
-            <a:ext cx="6522415" cy="4663440"/>
+            <a:off x="2697480" y="1737360"/>
+            <a:ext cx="9174175" cy="457200"/>
+          </a:xfrm>
+          <a:prstGeom prst="rect">
+            <a:avLst/>
+          </a:prstGeom>
+          <a:noFill/>
+          <a:ln/>
+        </p:spPr>
+        <p:txBody>
+          <a:bodyPr wrap="square" lIns="0" tIns="0" rIns="0" bIns="0" rtlCol="0" anchor="ctr"/>
+          <a:lstStyle/>
+          <a:p>
+            <a:pPr algn="l" indent="0" marL="0">
+              <a:buNone/>
+            </a:pPr>
+            <a:r>
+              <a:rPr lang="en-US" sz="3200" b="1" dirty="0">
+                <a:solidFill>
+                  <a:srgbClr val="990011"/>
+                </a:solidFill>
+                <a:latin typeface="Times New Roman" pitchFamily="34" charset="0"/>
+                <a:ea typeface="Times New Roman" pitchFamily="34" charset="-122"/>
+                <a:cs typeface="Times New Roman" pitchFamily="34" charset="-120"/>
+              </a:rPr>
+              <a:t>B) Disadvantages</a:t>
+            </a:r>
+            <a:endParaRPr lang="en-US" sz="3200" dirty="0"/>
+          </a:p>
+        </p:txBody>
+      </p:sp>
+      <p:sp>
+        <p:nvSpPr>
+          <p:cNvPr id="6" name="Text 3"/>
+          <p:cNvSpPr/>
+          <p:nvPr/>
+        </p:nvSpPr>
+        <p:spPr>
+          <a:xfrm>
+            <a:off x="2697480" y="2240280"/>
+            <a:ext cx="9174175" cy="4206240"/>
           </a:xfrm>
           <a:prstGeom prst="rect">
             <a:avLst/>
@@ -14701,7 +14905,7 @@
               <a:buNone/>
             </a:pPr>
             <a:r>
-              <a:rPr lang="en-US" sz="4000" b="1" dirty="0">
+              <a:rPr lang="en-US" sz="4000" i="1" dirty="0">
                 <a:solidFill>
                   <a:srgbClr val="111111"/>
                 </a:solidFill>
@@ -14709,8 +14913,11 @@
                 <a:ea typeface="Times New Roman" pitchFamily="34" charset="-122"/>
                 <a:cs typeface="Times New Roman" pitchFamily="34" charset="-120"/>
               </a:rPr>
-              <a:t>Cultural effects: </a:t>
-            </a:r>
+              <a:t>Globalisation has the following disadvantages:</a:t>
+            </a:r>
+            <a:endParaRPr lang="en-US" sz="4000" dirty="0"/>
+          </a:p>
+          <a:p>
             <a:pPr algn="l" indent="0" marL="0">
               <a:spcAft>
                 <a:spcPts val="800"/>
@@ -14718,7 +14925,7 @@
               <a:buNone/>
             </a:pPr>
             <a:r>
-              <a:rPr lang="en-US" sz="4000" dirty="0">
+              <a:rPr lang="en-US" sz="4000" b="1" dirty="0">
                 <a:solidFill>
                   <a:srgbClr val="111111"/>
                 </a:solidFill>
@@ -14726,7 +14933,61 @@
                 <a:ea typeface="Times New Roman" pitchFamily="34" charset="-122"/>
                 <a:cs typeface="Times New Roman" pitchFamily="34" charset="-120"/>
               </a:rPr>
-              <a:t>Local languages and traditions may be lost.</a:t>
+              <a:t>Unfair competition: </a:t>
+            </a:r>
+            <a:pPr algn="l" indent="0" marL="0">
+              <a:spcAft>
+                <a:spcPts val="800"/>
+              </a:spcAft>
+              <a:buNone/>
+            </a:pPr>
+            <a:r>
+              <a:rPr lang="en-US" sz="4000" dirty="0">
+                <a:solidFill>
+                  <a:srgbClr val="111111"/>
+                </a:solidFill>
+                <a:latin typeface="Times New Roman" pitchFamily="34" charset="0"/>
+                <a:ea typeface="Times New Roman" pitchFamily="34" charset="-122"/>
+                <a:cs typeface="Times New Roman" pitchFamily="34" charset="-120"/>
+              </a:rPr>
+              <a:t>Local industries cannot compete with big firms.</a:t>
+            </a:r>
+            <a:endParaRPr lang="en-US" sz="4000" dirty="0"/>
+          </a:p>
+          <a:p>
+            <a:pPr algn="l" indent="0" marL="0">
+              <a:spcAft>
+                <a:spcPts val="800"/>
+              </a:spcAft>
+              <a:buNone/>
+            </a:pPr>
+            <a:r>
+              <a:rPr lang="en-US" sz="4000" b="1" dirty="0">
+                <a:solidFill>
+                  <a:srgbClr val="111111"/>
+                </a:solidFill>
+                <a:latin typeface="Times New Roman" pitchFamily="34" charset="0"/>
+                <a:ea typeface="Times New Roman" pitchFamily="34" charset="-122"/>
+                <a:cs typeface="Times New Roman" pitchFamily="34" charset="-120"/>
+              </a:rPr>
+              <a:t>Unequal gains: </a:t>
+            </a:r>
+            <a:pPr algn="l" indent="0" marL="0">
+              <a:spcAft>
+                <a:spcPts val="800"/>
+              </a:spcAft>
+              <a:buNone/>
+            </a:pPr>
+            <a:r>
+              <a:rPr lang="en-US" sz="4000" dirty="0">
+                <a:solidFill>
+                  <a:srgbClr val="111111"/>
+                </a:solidFill>
+                <a:latin typeface="Times New Roman" pitchFamily="34" charset="0"/>
+                <a:ea typeface="Times New Roman" pitchFamily="34" charset="-122"/>
+                <a:cs typeface="Times New Roman" pitchFamily="34" charset="-120"/>
+              </a:rPr>
+              <a:t>Rich countries gain most.</a:t>
             </a:r>
             <a:endParaRPr lang="en-US" sz="4000" dirty="0"/>
           </a:p>
@@ -15077,7 +15338,7 @@
                 <a:ea typeface="Calibri" pitchFamily="34" charset="-122"/>
                 <a:cs typeface="Calibri" pitchFamily="34" charset="-120"/>
               </a:rPr>
-              <a:t>FORMATIVE EVALUATION</a:t>
+              <a:t>BOARD SUMMARY</a:t>
             </a:r>
             <a:endParaRPr lang="en-US" sz="1400" dirty="0"/>
           </a:p>
@@ -15142,7 +15403,7 @@
                 <a:ea typeface="Times New Roman" pitchFamily="34" charset="-122"/>
                 <a:cs typeface="Times New Roman" pitchFamily="34" charset="-120"/>
               </a:rPr>
-              <a:t>Evaluation 1</a:t>
+              <a:t>2. Advantages and Disadvantages</a:t>
             </a:r>
             <a:endParaRPr lang="en-US" sz="3600" dirty="0"/>
           </a:p>
@@ -15156,8 +15417,47 @@
         </p:nvSpPr>
         <p:spPr>
           <a:xfrm>
-            <a:off x="5349240" y="1783080"/>
-            <a:ext cx="6522415" cy="4663440"/>
+            <a:off x="5349240" y="1737360"/>
+            <a:ext cx="6522415" cy="457200"/>
+          </a:xfrm>
+          <a:prstGeom prst="rect">
+            <a:avLst/>
+          </a:prstGeom>
+          <a:noFill/>
+          <a:ln/>
+        </p:spPr>
+        <p:txBody>
+          <a:bodyPr wrap="square" lIns="0" tIns="0" rIns="0" bIns="0" rtlCol="0" anchor="ctr"/>
+          <a:lstStyle/>
+          <a:p>
+            <a:pPr algn="l" indent="0" marL="0">
+              <a:buNone/>
+            </a:pPr>
+            <a:r>
+              <a:rPr lang="en-US" sz="3200" b="1" dirty="0">
+                <a:solidFill>
+                  <a:srgbClr val="990011"/>
+                </a:solidFill>
+                <a:latin typeface="Times New Roman" pitchFamily="34" charset="0"/>
+                <a:ea typeface="Times New Roman" pitchFamily="34" charset="-122"/>
+                <a:cs typeface="Times New Roman" pitchFamily="34" charset="-120"/>
+              </a:rPr>
+              <a:t>B) Disadvantages (continued)</a:t>
+            </a:r>
+            <a:endParaRPr lang="en-US" sz="3200" dirty="0"/>
+          </a:p>
+        </p:txBody>
+      </p:sp>
+      <p:sp>
+        <p:nvSpPr>
+          <p:cNvPr id="6" name="Text 3"/>
+          <p:cNvSpPr/>
+          <p:nvPr/>
+        </p:nvSpPr>
+        <p:spPr>
+          <a:xfrm>
+            <a:off x="5349240" y="2240280"/>
+            <a:ext cx="6522415" cy="4206240"/>
           </a:xfrm>
           <a:prstGeom prst="rect">
             <a:avLst/>
@@ -15176,7 +15476,7 @@
               <a:buNone/>
             </a:pPr>
             <a:r>
-              <a:rPr lang="en-US" sz="4000" dirty="0">
+              <a:rPr lang="en-US" sz="4000" b="1" dirty="0">
                 <a:solidFill>
                   <a:srgbClr val="111111"/>
                 </a:solidFill>
@@ -15184,7 +15484,24 @@
                 <a:ea typeface="Times New Roman" pitchFamily="34" charset="-122"/>
                 <a:cs typeface="Times New Roman" pitchFamily="34" charset="-120"/>
               </a:rPr>
-              <a:t>Define globalisation.</a:t>
+              <a:t>Loss of culture: </a:t>
+            </a:r>
+            <a:pPr algn="l" indent="0" marL="0">
+              <a:spcAft>
+                <a:spcPts val="800"/>
+              </a:spcAft>
+              <a:buNone/>
+            </a:pPr>
+            <a:r>
+              <a:rPr lang="en-US" sz="4000" dirty="0">
+                <a:solidFill>
+                  <a:srgbClr val="111111"/>
+                </a:solidFill>
+                <a:latin typeface="Times New Roman" pitchFamily="34" charset="0"/>
+                <a:ea typeface="Times New Roman" pitchFamily="34" charset="-122"/>
+                <a:cs typeface="Times New Roman" pitchFamily="34" charset="-120"/>
+              </a:rPr>
+              <a:t>Local languages and traditions may be lost.</a:t>
             </a:r>
             <a:endParaRPr lang="en-US" sz="4000" dirty="0"/>
           </a:p>
@@ -15361,7 +15678,7 @@
                 <a:ea typeface="Times New Roman" pitchFamily="34" charset="-122"/>
                 <a:cs typeface="Times New Roman" pitchFamily="34" charset="-120"/>
               </a:rPr>
-              <a:t>Expected Answer</a:t>
+              <a:t>Evaluation 1</a:t>
             </a:r>
             <a:endParaRPr lang="en-US" sz="3600" dirty="0"/>
           </a:p>
@@ -15403,7 +15720,7 @@
                 <a:ea typeface="Times New Roman" pitchFamily="34" charset="-122"/>
                 <a:cs typeface="Times New Roman" pitchFamily="34" charset="-120"/>
               </a:rPr>
-              <a:t>Growing links between countries through trade, technology and culture.</a:t>
+              <a:t>Define globalisation.</a:t>
             </a:r>
             <a:endParaRPr lang="en-US" sz="4000" dirty="0"/>
           </a:p>
@@ -15580,7 +15897,7 @@
                 <a:ea typeface="Times New Roman" pitchFamily="34" charset="-122"/>
                 <a:cs typeface="Times New Roman" pitchFamily="34" charset="-120"/>
               </a:rPr>
-              <a:t>Evaluation 2</a:t>
+              <a:t>Expected Answer</a:t>
             </a:r>
             <a:endParaRPr lang="en-US" sz="3600" dirty="0"/>
           </a:p>
@@ -15622,7 +15939,7 @@
                 <a:ea typeface="Times New Roman" pitchFamily="34" charset="-122"/>
                 <a:cs typeface="Times New Roman" pitchFamily="34" charset="-120"/>
               </a:rPr>
-              <a:t>Give one advantage and one disadvantage.</a:t>
+              <a:t>Growing links between countries through trade, technology and culture.</a:t>
             </a:r>
             <a:endParaRPr lang="en-US" sz="4000" dirty="0"/>
           </a:p>
@@ -15799,7 +16116,7 @@
                 <a:ea typeface="Times New Roman" pitchFamily="34" charset="-122"/>
                 <a:cs typeface="Times New Roman" pitchFamily="34" charset="-120"/>
               </a:rPr>
-              <a:t>Expected Answer</a:t>
+              <a:t>Evaluation 2</a:t>
             </a:r>
             <a:endParaRPr lang="en-US" sz="3600" dirty="0"/>
           </a:p>
@@ -15841,7 +16158,7 @@
                 <a:ea typeface="Times New Roman" pitchFamily="34" charset="-122"/>
                 <a:cs typeface="Times New Roman" pitchFamily="34" charset="-120"/>
               </a:rPr>
-              <a:t>Cheaper goods; unfair competition.</a:t>
+              <a:t>Give one advantage and one disadvantage.</a:t>
             </a:r>
             <a:endParaRPr lang="en-US" sz="4000" dirty="0"/>
           </a:p>
@@ -15953,7 +16270,7 @@
                 <a:ea typeface="Calibri" pitchFamily="34" charset="-122"/>
                 <a:cs typeface="Calibri" pitchFamily="34" charset="-120"/>
               </a:rPr>
-              <a:t>REMEDIATION</a:t>
+              <a:t>FORMATIVE EVALUATION</a:t>
             </a:r>
             <a:endParaRPr lang="en-US" sz="1400" dirty="0"/>
           </a:p>
@@ -16018,7 +16335,7 @@
                 <a:ea typeface="Times New Roman" pitchFamily="34" charset="-122"/>
                 <a:cs typeface="Times New Roman" pitchFamily="34" charset="-120"/>
               </a:rPr>
-              <a:t>Remediation</a:t>
+              <a:t>Expected Answer</a:t>
             </a:r>
             <a:endParaRPr lang="en-US" sz="3600" dirty="0"/>
           </a:p>
@@ -16052,7 +16369,7 @@
               <a:buNone/>
             </a:pPr>
             <a:r>
-              <a:rPr lang="en-US" sz="4000" b="1" dirty="0">
+              <a:rPr lang="en-US" sz="4000" dirty="0">
                 <a:solidFill>
                   <a:srgbClr val="111111"/>
                 </a:solidFill>
@@ -16060,51 +16377,7 @@
                 <a:ea typeface="Times New Roman" pitchFamily="34" charset="-122"/>
                 <a:cs typeface="Times New Roman" pitchFamily="34" charset="-120"/>
               </a:rPr>
-              <a:t>Fill in the blanks:</a:t>
-            </a:r>
-            <a:endParaRPr lang="en-US" sz="4000" dirty="0"/>
-          </a:p>
-          <a:p>
-            <a:pPr algn="l" marL="342900" indent="-342900">
-              <a:spcAft>
-                <a:spcPts val="800"/>
-              </a:spcAft>
-              <a:buSzPct val="100000"/>
-              <a:buFont typeface="+mj-lt"/>
-              <a:buAutoNum type="arabicPeriod" startAt="1"/>
-            </a:pPr>
-            <a:r>
-              <a:rPr lang="en-US" sz="4000" dirty="0">
-                <a:solidFill>
-                  <a:srgbClr val="111111"/>
-                </a:solidFill>
-                <a:latin typeface="Times New Roman" pitchFamily="34" charset="0"/>
-                <a:ea typeface="Times New Roman" pitchFamily="34" charset="-122"/>
-                <a:cs typeface="Times New Roman" pitchFamily="34" charset="-120"/>
-              </a:rPr>
-              <a:t>Firms working in many countries are ______ companies.</a:t>
-            </a:r>
-            <a:endParaRPr lang="en-US" sz="4000" dirty="0"/>
-          </a:p>
-          <a:p>
-            <a:pPr algn="l" marL="342900" indent="-342900">
-              <a:spcAft>
-                <a:spcPts val="800"/>
-              </a:spcAft>
-              <a:buSzPct val="100000"/>
-              <a:buFont typeface="+mj-lt"/>
-              <a:buAutoNum type="arabicPeriod" startAt="1"/>
-            </a:pPr>
-            <a:r>
-              <a:rPr lang="en-US" sz="4000" dirty="0">
-                <a:solidFill>
-                  <a:srgbClr val="111111"/>
-                </a:solidFill>
-                <a:latin typeface="Times New Roman" pitchFamily="34" charset="0"/>
-                <a:ea typeface="Times New Roman" pitchFamily="34" charset="-122"/>
-                <a:cs typeface="Times New Roman" pitchFamily="34" charset="-120"/>
-              </a:rPr>
-              <a:t>The world linked by communication is a global ______.</a:t>
+              <a:t>Cheaper goods; unfair competition.</a:t>
             </a:r>
             <a:endParaRPr lang="en-US" sz="4000" dirty="0"/>
           </a:p>
@@ -16281,7 +16554,7 @@
                 <a:ea typeface="Times New Roman" pitchFamily="34" charset="-122"/>
                 <a:cs typeface="Times New Roman" pitchFamily="34" charset="-120"/>
               </a:rPr>
-              <a:t>Remediation (continued)</a:t>
+              <a:t>Remediation</a:t>
             </a:r>
             <a:endParaRPr lang="en-US" sz="3600" dirty="0"/>
           </a:p>
@@ -16307,6 +16580,26 @@
         <p:txBody>
           <a:bodyPr wrap="square" lIns="0" tIns="0" rIns="0" bIns="0" rtlCol="0" anchor="t"/>
           <a:lstStyle/>
+          <a:p>
+            <a:pPr algn="l" indent="0" marL="0">
+              <a:spcAft>
+                <a:spcPts val="800"/>
+              </a:spcAft>
+              <a:buNone/>
+            </a:pPr>
+            <a:r>
+              <a:rPr lang="en-US" sz="4000" b="1" dirty="0">
+                <a:solidFill>
+                  <a:srgbClr val="111111"/>
+                </a:solidFill>
+                <a:latin typeface="Times New Roman" pitchFamily="34" charset="0"/>
+                <a:ea typeface="Times New Roman" pitchFamily="34" charset="-122"/>
+                <a:cs typeface="Times New Roman" pitchFamily="34" charset="-120"/>
+              </a:rPr>
+              <a:t>Fill in the blanks:</a:t>
+            </a:r>
+            <a:endParaRPr lang="en-US" sz="4000" dirty="0"/>
+          </a:p>
           <a:p>
             <a:pPr algn="l" marL="342900" indent="-342900">
               <a:spcAft>
@@ -16325,7 +16618,29 @@
                 <a:ea typeface="Times New Roman" pitchFamily="34" charset="-122"/>
                 <a:cs typeface="Times New Roman" pitchFamily="34" charset="-120"/>
               </a:rPr>
-              <a:t>Loss of local traditions is a ______ effect of globalisation.</a:t>
+              <a:t>Firms working in many countries are ______ companies.</a:t>
+            </a:r>
+            <a:endParaRPr lang="en-US" sz="4000" dirty="0"/>
+          </a:p>
+          <a:p>
+            <a:pPr algn="l" marL="342900" indent="-342900">
+              <a:spcAft>
+                <a:spcPts val="800"/>
+              </a:spcAft>
+              <a:buSzPct val="100000"/>
+              <a:buFont typeface="+mj-lt"/>
+              <a:buAutoNum type="arabicPeriod" startAt="1"/>
+            </a:pPr>
+            <a:r>
+              <a:rPr lang="en-US" sz="4000" dirty="0">
+                <a:solidFill>
+                  <a:srgbClr val="111111"/>
+                </a:solidFill>
+                <a:latin typeface="Times New Roman" pitchFamily="34" charset="0"/>
+                <a:ea typeface="Times New Roman" pitchFamily="34" charset="-122"/>
+                <a:cs typeface="Times New Roman" pitchFamily="34" charset="-120"/>
+              </a:rPr>
+              <a:t>The world linked by communication is a global ______.</a:t>
             </a:r>
             <a:endParaRPr lang="en-US" sz="4000" dirty="0"/>
           </a:p>
@@ -16437,7 +16752,7 @@
                 <a:ea typeface="Calibri" pitchFamily="34" charset="-122"/>
                 <a:cs typeface="Calibri" pitchFamily="34" charset="-120"/>
               </a:rPr>
-              <a:t>HOMEWORK</a:t>
+              <a:t>REMEDIATION</a:t>
             </a:r>
             <a:endParaRPr lang="en-US" sz="1400" dirty="0"/>
           </a:p>
@@ -16502,7 +16817,7 @@
                 <a:ea typeface="Times New Roman" pitchFamily="34" charset="-122"/>
                 <a:cs typeface="Times New Roman" pitchFamily="34" charset="-120"/>
               </a:rPr>
-              <a:t>Homework</a:t>
+              <a:t>Remediation (continued)</a:t>
             </a:r>
             <a:endParaRPr lang="en-US" sz="3600" dirty="0"/>
           </a:p>
@@ -16529,11 +16844,13 @@
           <a:bodyPr wrap="square" lIns="0" tIns="0" rIns="0" bIns="0" rtlCol="0" anchor="t"/>
           <a:lstStyle/>
           <a:p>
-            <a:pPr algn="l" indent="0" marL="0">
+            <a:pPr algn="l" marL="342900" indent="-342900">
               <a:spcAft>
                 <a:spcPts val="800"/>
               </a:spcAft>
-              <a:buNone/>
+              <a:buSzPct val="100000"/>
+              <a:buFont typeface="+mj-lt"/>
+              <a:buAutoNum type="arabicPeriod" startAt="1"/>
             </a:pPr>
             <a:r>
               <a:rPr lang="en-US" sz="4000" dirty="0">
@@ -16544,7 +16861,7 @@
                 <a:ea typeface="Times New Roman" pitchFamily="34" charset="-122"/>
                 <a:cs typeface="Times New Roman" pitchFamily="34" charset="-120"/>
               </a:rPr>
-              <a:t>List five foreign products used in your home and their countries of origin.</a:t>
+              <a:t>Loss of local traditions is a ______ effect of globalisation.</a:t>
             </a:r>
             <a:endParaRPr lang="en-US" sz="4000" dirty="0"/>
           </a:p>
@@ -16656,7 +16973,7 @@
                 <a:ea typeface="Calibri" pitchFamily="34" charset="-122"/>
                 <a:cs typeface="Calibri" pitchFamily="34" charset="-120"/>
               </a:rPr>
-              <a:t>NEXT LESSON</a:t>
+              <a:t>HOMEWORK</a:t>
             </a:r>
             <a:endParaRPr lang="en-US" sz="1400" dirty="0"/>
           </a:p>
@@ -16721,7 +17038,7 @@
                 <a:ea typeface="Times New Roman" pitchFamily="34" charset="-122"/>
                 <a:cs typeface="Times New Roman" pitchFamily="34" charset="-120"/>
               </a:rPr>
-              <a:t>Next Lesson</a:t>
+              <a:t>Homework</a:t>
             </a:r>
             <a:endParaRPr lang="en-US" sz="3600" dirty="0"/>
           </a:p>
@@ -16745,17 +17062,17 @@
           <a:ln/>
         </p:spPr>
         <p:txBody>
-          <a:bodyPr wrap="square" lIns="0" tIns="0" rIns="0" bIns="0" rtlCol="0" anchor="ctr"/>
-          <a:lstStyle/>
-          <a:p>
-            <a:pPr algn="ctr" indent="0" marL="0">
+          <a:bodyPr wrap="square" lIns="0" tIns="0" rIns="0" bIns="0" rtlCol="0" anchor="t"/>
+          <a:lstStyle/>
+          <a:p>
+            <a:pPr algn="l" indent="0" marL="0">
               <a:spcAft>
                 <a:spcPts val="800"/>
               </a:spcAft>
               <a:buNone/>
             </a:pPr>
             <a:r>
-              <a:rPr lang="en-US" sz="4000" b="1" dirty="0">
+              <a:rPr lang="en-US" sz="4000" dirty="0">
                 <a:solidFill>
                   <a:srgbClr val="111111"/>
                 </a:solidFill>
@@ -16763,27 +17080,7 @@
                 <a:ea typeface="Times New Roman" pitchFamily="34" charset="-122"/>
                 <a:cs typeface="Times New Roman" pitchFamily="34" charset="-120"/>
               </a:rPr>
-              <a:t>Our next lesson will be on:</a:t>
-            </a:r>
-            <a:endParaRPr lang="en-US" sz="4000" dirty="0"/>
-          </a:p>
-          <a:p>
-            <a:pPr algn="ctr" indent="0" marL="0">
-              <a:spcAft>
-                <a:spcPts val="800"/>
-              </a:spcAft>
-              <a:buNone/>
-            </a:pPr>
-            <a:r>
-              <a:rPr lang="en-US" sz="4000" b="1" dirty="0">
-                <a:solidFill>
-                  <a:srgbClr val="990011"/>
-                </a:solidFill>
-                <a:latin typeface="Times New Roman" pitchFamily="34" charset="0"/>
-                <a:ea typeface="Times New Roman" pitchFamily="34" charset="-122"/>
-                <a:cs typeface="Times New Roman" pitchFamily="34" charset="-120"/>
-              </a:rPr>
-              <a:t>Lesson 15: Telecommunication (Internet Communication)</a:t>
+              <a:t>List five foreign products used in your home and their countries of origin.</a:t>
             </a:r>
             <a:endParaRPr lang="en-US" sz="4000" dirty="0"/>
           </a:p>
@@ -16895,6 +17192,245 @@
                 <a:ea typeface="Calibri" pitchFamily="34" charset="-122"/>
                 <a:cs typeface="Calibri" pitchFamily="34" charset="-120"/>
               </a:rPr>
+              <a:t>NEXT LESSON</a:t>
+            </a:r>
+            <a:endParaRPr lang="en-US" sz="1400" dirty="0"/>
+          </a:p>
+        </p:txBody>
+      </p:sp>
+      <p:pic>
+        <p:nvPicPr>
+          <p:cNvPr id="3" name="Image 0" descr="/home/claude/f4/img/minesec_sheet.png">    </p:cNvPr>
+          <p:cNvPicPr>
+            <a:picLocks noChangeAspect="1"/>
+          </p:cNvPicPr>
+          <p:nvPr/>
+        </p:nvPicPr>
+        <p:blipFill>
+          <a:blip r:embed="rId1"/>
+          <a:stretch>
+            <a:fillRect/>
+          </a:stretch>
+        </p:blipFill>
+        <p:spPr>
+          <a:xfrm>
+            <a:off x="0" y="658368"/>
+            <a:ext cx="5120640" cy="5833872"/>
+          </a:xfrm>
+          <a:prstGeom prst="rect">
+            <a:avLst/>
+          </a:prstGeom>
+        </p:spPr>
+      </p:pic>
+      <p:sp>
+        <p:nvSpPr>
+          <p:cNvPr id="4" name="Text 1"/>
+          <p:cNvSpPr/>
+          <p:nvPr/>
+        </p:nvSpPr>
+        <p:spPr>
+          <a:xfrm>
+            <a:off x="5349240" y="1005840"/>
+            <a:ext cx="6522415" cy="731520"/>
+          </a:xfrm>
+          <a:prstGeom prst="rect">
+            <a:avLst/>
+          </a:prstGeom>
+          <a:noFill/>
+          <a:ln/>
+        </p:spPr>
+        <p:txBody>
+          <a:bodyPr wrap="square" lIns="0" tIns="0" rIns="0" bIns="0" rtlCol="0" anchor="ctr">
+            <a:normAutofit/>
+          </a:bodyPr>
+          <a:lstStyle/>
+          <a:p>
+            <a:pPr algn="ctr" indent="0" marL="0">
+              <a:buNone/>
+            </a:pPr>
+            <a:r>
+              <a:rPr lang="en-US" sz="3600" b="1" dirty="0">
+                <a:solidFill>
+                  <a:srgbClr val="990011"/>
+                </a:solidFill>
+                <a:latin typeface="Times New Roman" pitchFamily="34" charset="0"/>
+                <a:ea typeface="Times New Roman" pitchFamily="34" charset="-122"/>
+                <a:cs typeface="Times New Roman" pitchFamily="34" charset="-120"/>
+              </a:rPr>
+              <a:t>Next Lesson</a:t>
+            </a:r>
+            <a:endParaRPr lang="en-US" sz="3600" dirty="0"/>
+          </a:p>
+        </p:txBody>
+      </p:sp>
+      <p:sp>
+        <p:nvSpPr>
+          <p:cNvPr id="5" name="Text 2"/>
+          <p:cNvSpPr/>
+          <p:nvPr/>
+        </p:nvSpPr>
+        <p:spPr>
+          <a:xfrm>
+            <a:off x="5349240" y="1783080"/>
+            <a:ext cx="6522415" cy="4663440"/>
+          </a:xfrm>
+          <a:prstGeom prst="rect">
+            <a:avLst/>
+          </a:prstGeom>
+          <a:noFill/>
+          <a:ln/>
+        </p:spPr>
+        <p:txBody>
+          <a:bodyPr wrap="square" lIns="0" tIns="0" rIns="0" bIns="0" rtlCol="0" anchor="ctr"/>
+          <a:lstStyle/>
+          <a:p>
+            <a:pPr algn="ctr" indent="0" marL="0">
+              <a:spcAft>
+                <a:spcPts val="800"/>
+              </a:spcAft>
+              <a:buNone/>
+            </a:pPr>
+            <a:r>
+              <a:rPr lang="en-US" sz="4000" b="1" dirty="0">
+                <a:solidFill>
+                  <a:srgbClr val="111111"/>
+                </a:solidFill>
+                <a:latin typeface="Times New Roman" pitchFamily="34" charset="0"/>
+                <a:ea typeface="Times New Roman" pitchFamily="34" charset="-122"/>
+                <a:cs typeface="Times New Roman" pitchFamily="34" charset="-120"/>
+              </a:rPr>
+              <a:t>Our next lesson will be on:</a:t>
+            </a:r>
+            <a:endParaRPr lang="en-US" sz="4000" dirty="0"/>
+          </a:p>
+          <a:p>
+            <a:pPr algn="ctr" indent="0" marL="0">
+              <a:spcAft>
+                <a:spcPts val="800"/>
+              </a:spcAft>
+              <a:buNone/>
+            </a:pPr>
+            <a:r>
+              <a:rPr lang="en-US" sz="4000" b="1" dirty="0">
+                <a:solidFill>
+                  <a:srgbClr val="990011"/>
+                </a:solidFill>
+                <a:latin typeface="Times New Roman" pitchFamily="34" charset="0"/>
+                <a:ea typeface="Times New Roman" pitchFamily="34" charset="-122"/>
+                <a:cs typeface="Times New Roman" pitchFamily="34" charset="-120"/>
+              </a:rPr>
+              <a:t>Lesson 15: Telecommunication (Internet Communication)</a:t>
+            </a:r>
+            <a:endParaRPr lang="en-US" sz="4000" dirty="0"/>
+          </a:p>
+        </p:txBody>
+      </p:sp>
+      <p:sp>
+        <p:nvSpPr>
+          <p:cNvPr id="25" name="Slide Number Placeholder 0"/>
+          <p:cNvSpPr>
+            <a:spLocks noGrp="1"/>
+          </p:cNvSpPr>
+          <p:nvPr>
+            <p:ph type="sldNum" sz="quarter" idx="4294967295"/>
+          </p:nvPr>
+        </p:nvSpPr>
+        <p:spPr>
+          <a:xfrm>
+            <a:off x="27432" y="91440"/>
+            <a:ext cx="585216" cy="475488"/>
+          </a:xfrm>
+          <a:prstGeom prst="rect">
+            <a:avLst/>
+          </a:prstGeom>
+          <a:extLst>
+            <a:ext uri="{C572A759-6A51-4108-AA02-DFA0A04FC94B}">
+              <ma14:wrappingTextBoxFlag xmlns:ma14="http://schemas.microsoft.com/office/mac/drawingml/2011/main" val="0"/>
+            </a:ext>
+          </a:extLst>
+        </p:spPr>
+        <p:txBody>
+          <a:bodyPr/>
+          <a:lstStyle>
+            <a:lvl1pPr>
+              <a:defRPr sz="2000">
+                <a:solidFill>
+                  <a:srgbClr val="FFFFFF"/>
+                </a:solidFill>
+                <a:latin typeface="Calibri"/>
+                <a:ea typeface="Calibri"/>
+                <a:cs typeface="Calibri"/>
+              </a:defRPr>
+            </a:lvl1pPr>
+          </a:lstStyle>
+          <a:p>
+            <a:pPr algn="ctr"/>
+            <a:fld id="{F7021451-1387-4CA6-816F-3879F97B5CBC}" type="slidenum">
+              <a:rPr b="1" lang="en-US"/>
+              <a:t>48</a:t>
+            </a:fld>
+            <a:endParaRPr lang="en-US"/>
+          </a:p>
+        </p:txBody>
+      </p:sp>
+    </p:spTree>
+  </p:cSld>
+  <p:clrMapOvr>
+    <a:masterClrMapping/>
+  </p:clrMapOvr>
+</p:sld>
+</file>
+
+<file path=ppt/slides/slide49.xml><?xml version="1.0" encoding="utf-8"?>
+<p:sld xmlns:a="http://schemas.openxmlformats.org/drawingml/2006/main" xmlns:r="http://schemas.openxmlformats.org/officeDocument/2006/relationships" xmlns:p="http://schemas.openxmlformats.org/presentationml/2006/main">
+  <p:cSld name="Slide 49">
+    <p:spTree>
+      <p:nvGrpSpPr>
+        <p:cNvPr id="1" name=""/>
+        <p:cNvGrpSpPr/>
+        <p:nvPr/>
+      </p:nvGrpSpPr>
+      <p:grpSpPr>
+        <a:xfrm>
+          <a:off x="0" y="0"/>
+          <a:ext cx="0" cy="0"/>
+          <a:chOff x="0" y="0"/>
+          <a:chExt cx="0" cy="0"/>
+        </a:xfrm>
+      </p:grpSpPr>
+      <p:sp>
+        <p:nvSpPr>
+          <p:cNvPr id="2" name="Text 0"/>
+          <p:cNvSpPr/>
+          <p:nvPr/>
+        </p:nvSpPr>
+        <p:spPr>
+          <a:xfrm>
+            <a:off x="457200" y="713232"/>
+            <a:ext cx="11368735" cy="274320"/>
+          </a:xfrm>
+          <a:prstGeom prst="rect">
+            <a:avLst/>
+          </a:prstGeom>
+          <a:noFill/>
+          <a:ln/>
+        </p:spPr>
+        <p:txBody>
+          <a:bodyPr wrap="square" lIns="0" tIns="0" rIns="0" bIns="0" rtlCol="0" anchor="ctr"/>
+          <a:lstStyle/>
+          <a:p>
+            <a:pPr algn="r" indent="0" marL="0">
+              <a:buNone/>
+            </a:pPr>
+            <a:r>
+              <a:rPr lang="en-US" sz="1400" b="1" dirty="0">
+                <a:solidFill>
+                  <a:srgbClr val="1C3F6E"/>
+                </a:solidFill>
+                <a:latin typeface="Calibri" pitchFamily="34" charset="0"/>
+                <a:ea typeface="Calibri" pitchFamily="34" charset="-122"/>
+                <a:cs typeface="Calibri" pitchFamily="34" charset="-120"/>
+              </a:rPr>
               <a:t>BILINGUAL GAME</a:t>
             </a:r>
             <a:endParaRPr lang="en-US" sz="1400" dirty="0"/>
@@ -16942,7 +17478,7 @@
       </p:sp>
       <p:graphicFrame>
         <p:nvGraphicFramePr>
-          <p:cNvPr id="49" name="Table 0"/>
+          <p:cNvPr id="50" name="Table 0"/>
           <p:cNvGraphicFramePr>
             <a:graphicFrameLocks noGrp="1"/>
           </p:cNvGraphicFramePr>
@@ -17978,7 +18514,7 @@
             <a:pPr algn="ctr"/>
             <a:fld id="{F7021451-1387-4CA6-816F-3879F97B5CBC}" type="slidenum">
               <a:rPr b="1" lang="en-US"/>
-              <a:t>48</a:t>
+              <a:t>49</a:t>
             </a:fld>
             <a:endParaRPr lang="en-US"/>
           </a:p>
@@ -17992,9 +18528,9 @@
 </p:sld>
 </file>
 
-<file path=ppt/slides/slide49.xml><?xml version="1.0" encoding="utf-8"?>
+<file path=ppt/slides/slide5.xml><?xml version="1.0" encoding="utf-8"?>
 <p:sld xmlns:a="http://schemas.openxmlformats.org/drawingml/2006/main" xmlns:r="http://schemas.openxmlformats.org/officeDocument/2006/relationships" xmlns:p="http://schemas.openxmlformats.org/presentationml/2006/main">
-  <p:cSld name="Slide 49">
+  <p:cSld name="Slide 5">
     <p:spTree>
       <p:nvGrpSpPr>
         <p:cNvPr id="1" name=""/>
@@ -18042,6 +18578,225 @@
                 <a:ea typeface="Calibri" pitchFamily="34" charset="-122"/>
                 <a:cs typeface="Calibri" pitchFamily="34" charset="-120"/>
               </a:rPr>
+              <a:t>HOMEWORK CORRECTION</a:t>
+            </a:r>
+            <a:endParaRPr lang="en-US" sz="1400" dirty="0"/>
+          </a:p>
+        </p:txBody>
+      </p:sp>
+      <p:pic>
+        <p:nvPicPr>
+          <p:cNvPr id="3" name="Image 0" descr="/home/claude/f4/img/minesec_sheet.png">    </p:cNvPr>
+          <p:cNvPicPr>
+            <a:picLocks noChangeAspect="1"/>
+          </p:cNvPicPr>
+          <p:nvPr/>
+        </p:nvPicPr>
+        <p:blipFill>
+          <a:blip r:embed="rId1"/>
+          <a:stretch>
+            <a:fillRect/>
+          </a:stretch>
+        </p:blipFill>
+        <p:spPr>
+          <a:xfrm>
+            <a:off x="0" y="658368"/>
+            <a:ext cx="5120640" cy="5833872"/>
+          </a:xfrm>
+          <a:prstGeom prst="rect">
+            <a:avLst/>
+          </a:prstGeom>
+        </p:spPr>
+      </p:pic>
+      <p:sp>
+        <p:nvSpPr>
+          <p:cNvPr id="4" name="Text 1"/>
+          <p:cNvSpPr/>
+          <p:nvPr/>
+        </p:nvSpPr>
+        <p:spPr>
+          <a:xfrm>
+            <a:off x="5349240" y="1005840"/>
+            <a:ext cx="6522415" cy="731520"/>
+          </a:xfrm>
+          <a:prstGeom prst="rect">
+            <a:avLst/>
+          </a:prstGeom>
+          <a:noFill/>
+          <a:ln/>
+        </p:spPr>
+        <p:txBody>
+          <a:bodyPr wrap="square" lIns="0" tIns="0" rIns="0" bIns="0" rtlCol="0" anchor="ctr">
+            <a:normAutofit/>
+          </a:bodyPr>
+          <a:lstStyle/>
+          <a:p>
+            <a:pPr algn="ctr" indent="0" marL="0">
+              <a:buNone/>
+            </a:pPr>
+            <a:r>
+              <a:rPr lang="en-US" sz="3600" b="1" dirty="0">
+                <a:solidFill>
+                  <a:srgbClr val="990011"/>
+                </a:solidFill>
+                <a:latin typeface="Times New Roman" pitchFamily="34" charset="0"/>
+                <a:ea typeface="Times New Roman" pitchFamily="34" charset="-122"/>
+                <a:cs typeface="Times New Roman" pitchFamily="34" charset="-120"/>
+              </a:rPr>
+              <a:t>Correction: Possible Answer</a:t>
+            </a:r>
+            <a:endParaRPr lang="en-US" sz="3600" dirty="0"/>
+          </a:p>
+        </p:txBody>
+      </p:sp>
+      <p:sp>
+        <p:nvSpPr>
+          <p:cNvPr id="5" name="Text 2"/>
+          <p:cNvSpPr/>
+          <p:nvPr/>
+        </p:nvSpPr>
+        <p:spPr>
+          <a:xfrm>
+            <a:off x="5349240" y="1783080"/>
+            <a:ext cx="6522415" cy="4663440"/>
+          </a:xfrm>
+          <a:prstGeom prst="rect">
+            <a:avLst/>
+          </a:prstGeom>
+          <a:noFill/>
+          <a:ln/>
+        </p:spPr>
+        <p:txBody>
+          <a:bodyPr wrap="square" lIns="0" tIns="0" rIns="0" bIns="0" rtlCol="0" anchor="t"/>
+          <a:lstStyle/>
+          <a:p>
+            <a:pPr algn="l" indent="0" marL="0">
+              <a:spcAft>
+                <a:spcPts val="800"/>
+              </a:spcAft>
+              <a:buNone/>
+            </a:pPr>
+            <a:r>
+              <a:rPr lang="en-US" sz="4000" dirty="0">
+                <a:solidFill>
+                  <a:srgbClr val="111111"/>
+                </a:solidFill>
+                <a:latin typeface="Times New Roman" pitchFamily="34" charset="0"/>
+                <a:ea typeface="Times New Roman" pitchFamily="34" charset="-122"/>
+                <a:cs typeface="Times New Roman" pitchFamily="34" charset="-120"/>
+              </a:rPr>
+              <a:t>A sketch showing Doba (Chad) linked through Ngaoundéré (Adamawa) and Belabo to Kribi, with a title, key and north arrow.</a:t>
+            </a:r>
+            <a:endParaRPr lang="en-US" sz="4000" dirty="0"/>
+          </a:p>
+        </p:txBody>
+      </p:sp>
+      <p:sp>
+        <p:nvSpPr>
+          <p:cNvPr id="25" name="Slide Number Placeholder 0"/>
+          <p:cNvSpPr>
+            <a:spLocks noGrp="1"/>
+          </p:cNvSpPr>
+          <p:nvPr>
+            <p:ph type="sldNum" sz="quarter" idx="4294967295"/>
+          </p:nvPr>
+        </p:nvSpPr>
+        <p:spPr>
+          <a:xfrm>
+            <a:off x="27432" y="91440"/>
+            <a:ext cx="585216" cy="475488"/>
+          </a:xfrm>
+          <a:prstGeom prst="rect">
+            <a:avLst/>
+          </a:prstGeom>
+          <a:extLst>
+            <a:ext uri="{C572A759-6A51-4108-AA02-DFA0A04FC94B}">
+              <ma14:wrappingTextBoxFlag xmlns:ma14="http://schemas.microsoft.com/office/mac/drawingml/2011/main" val="0"/>
+            </a:ext>
+          </a:extLst>
+        </p:spPr>
+        <p:txBody>
+          <a:bodyPr/>
+          <a:lstStyle>
+            <a:lvl1pPr>
+              <a:defRPr sz="2000">
+                <a:solidFill>
+                  <a:srgbClr val="FFFFFF"/>
+                </a:solidFill>
+                <a:latin typeface="Calibri"/>
+                <a:ea typeface="Calibri"/>
+                <a:cs typeface="Calibri"/>
+              </a:defRPr>
+            </a:lvl1pPr>
+          </a:lstStyle>
+          <a:p>
+            <a:pPr algn="ctr"/>
+            <a:fld id="{F7021451-1387-4CA6-816F-3879F97B5CBC}" type="slidenum">
+              <a:rPr b="1" lang="en-US"/>
+              <a:t>5</a:t>
+            </a:fld>
+            <a:endParaRPr lang="en-US"/>
+          </a:p>
+        </p:txBody>
+      </p:sp>
+    </p:spTree>
+  </p:cSld>
+  <p:clrMapOvr>
+    <a:masterClrMapping/>
+  </p:clrMapOvr>
+</p:sld>
+</file>
+
+<file path=ppt/slides/slide50.xml><?xml version="1.0" encoding="utf-8"?>
+<p:sld xmlns:a="http://schemas.openxmlformats.org/drawingml/2006/main" xmlns:r="http://schemas.openxmlformats.org/officeDocument/2006/relationships" xmlns:p="http://schemas.openxmlformats.org/presentationml/2006/main">
+  <p:cSld name="Slide 50">
+    <p:spTree>
+      <p:nvGrpSpPr>
+        <p:cNvPr id="1" name=""/>
+        <p:cNvGrpSpPr/>
+        <p:nvPr/>
+      </p:nvGrpSpPr>
+      <p:grpSpPr>
+        <a:xfrm>
+          <a:off x="0" y="0"/>
+          <a:ext cx="0" cy="0"/>
+          <a:chOff x="0" y="0"/>
+          <a:chExt cx="0" cy="0"/>
+        </a:xfrm>
+      </p:grpSpPr>
+      <p:sp>
+        <p:nvSpPr>
+          <p:cNvPr id="2" name="Text 0"/>
+          <p:cNvSpPr/>
+          <p:nvPr/>
+        </p:nvSpPr>
+        <p:spPr>
+          <a:xfrm>
+            <a:off x="457200" y="713232"/>
+            <a:ext cx="11368735" cy="274320"/>
+          </a:xfrm>
+          <a:prstGeom prst="rect">
+            <a:avLst/>
+          </a:prstGeom>
+          <a:noFill/>
+          <a:ln/>
+        </p:spPr>
+        <p:txBody>
+          <a:bodyPr wrap="square" lIns="0" tIns="0" rIns="0" bIns="0" rtlCol="0" anchor="ctr"/>
+          <a:lstStyle/>
+          <a:p>
+            <a:pPr algn="r" indent="0" marL="0">
+              <a:buNone/>
+            </a:pPr>
+            <a:r>
+              <a:rPr lang="en-US" sz="1400" b="1" dirty="0">
+                <a:solidFill>
+                  <a:srgbClr val="1C3F6E"/>
+                </a:solidFill>
+                <a:latin typeface="Calibri" pitchFamily="34" charset="0"/>
+                <a:ea typeface="Calibri" pitchFamily="34" charset="-122"/>
+                <a:cs typeface="Calibri" pitchFamily="34" charset="-120"/>
+              </a:rPr>
               <a:t>LOGBOOK</a:t>
             </a:r>
             <a:endParaRPr lang="en-US" sz="1400" dirty="0"/>
@@ -18089,7 +18844,7 @@
       </p:sp>
       <p:graphicFrame>
         <p:nvGraphicFramePr>
-          <p:cNvPr id="50" name="Table 0"/>
+          <p:cNvPr id="51" name="Table 0"/>
           <p:cNvGraphicFramePr>
             <a:graphicFrameLocks noGrp="1"/>
           </p:cNvGraphicFramePr>
@@ -18711,7 +19466,7 @@
             <a:pPr algn="ctr"/>
             <a:fld id="{F7021451-1387-4CA6-816F-3879F97B5CBC}" type="slidenum">
               <a:rPr b="1" lang="en-US"/>
-              <a:t>49</a:t>
+              <a:t>50</a:t>
             </a:fld>
             <a:endParaRPr lang="en-US"/>
           </a:p>
@@ -18725,9 +19480,9 @@
 </p:sld>
 </file>
 
-<file path=ppt/slides/slide5.xml><?xml version="1.0" encoding="utf-8"?>
+<file path=ppt/slides/slide51.xml><?xml version="1.0" encoding="utf-8"?>
 <p:sld xmlns:a="http://schemas.openxmlformats.org/drawingml/2006/main" xmlns:r="http://schemas.openxmlformats.org/officeDocument/2006/relationships" xmlns:p="http://schemas.openxmlformats.org/presentationml/2006/main">
-  <p:cSld name="Slide 5">
+  <p:cSld name="Slide 51">
     <p:spTree>
       <p:nvGrpSpPr>
         <p:cNvPr id="1" name=""/>
@@ -18775,225 +19530,6 @@
                 <a:ea typeface="Calibri" pitchFamily="34" charset="-122"/>
                 <a:cs typeface="Calibri" pitchFamily="34" charset="-120"/>
               </a:rPr>
-              <a:t>HOMEWORK CORRECTION</a:t>
-            </a:r>
-            <a:endParaRPr lang="en-US" sz="1400" dirty="0"/>
-          </a:p>
-        </p:txBody>
-      </p:sp>
-      <p:pic>
-        <p:nvPicPr>
-          <p:cNvPr id="3" name="Image 0" descr="/home/claude/f4/img/minesec_sheet.png">    </p:cNvPr>
-          <p:cNvPicPr>
-            <a:picLocks noChangeAspect="1"/>
-          </p:cNvPicPr>
-          <p:nvPr/>
-        </p:nvPicPr>
-        <p:blipFill>
-          <a:blip r:embed="rId1"/>
-          <a:stretch>
-            <a:fillRect/>
-          </a:stretch>
-        </p:blipFill>
-        <p:spPr>
-          <a:xfrm>
-            <a:off x="0" y="658368"/>
-            <a:ext cx="5120640" cy="5833872"/>
-          </a:xfrm>
-          <a:prstGeom prst="rect">
-            <a:avLst/>
-          </a:prstGeom>
-        </p:spPr>
-      </p:pic>
-      <p:sp>
-        <p:nvSpPr>
-          <p:cNvPr id="4" name="Text 1"/>
-          <p:cNvSpPr/>
-          <p:nvPr/>
-        </p:nvSpPr>
-        <p:spPr>
-          <a:xfrm>
-            <a:off x="5349240" y="1005840"/>
-            <a:ext cx="6522415" cy="731520"/>
-          </a:xfrm>
-          <a:prstGeom prst="rect">
-            <a:avLst/>
-          </a:prstGeom>
-          <a:noFill/>
-          <a:ln/>
-        </p:spPr>
-        <p:txBody>
-          <a:bodyPr wrap="square" lIns="0" tIns="0" rIns="0" bIns="0" rtlCol="0" anchor="ctr">
-            <a:normAutofit/>
-          </a:bodyPr>
-          <a:lstStyle/>
-          <a:p>
-            <a:pPr algn="ctr" indent="0" marL="0">
-              <a:buNone/>
-            </a:pPr>
-            <a:r>
-              <a:rPr lang="en-US" sz="3600" b="1" dirty="0">
-                <a:solidFill>
-                  <a:srgbClr val="990011"/>
-                </a:solidFill>
-                <a:latin typeface="Times New Roman" pitchFamily="34" charset="0"/>
-                <a:ea typeface="Times New Roman" pitchFamily="34" charset="-122"/>
-                <a:cs typeface="Times New Roman" pitchFamily="34" charset="-120"/>
-              </a:rPr>
-              <a:t>Correction: Possible Answer</a:t>
-            </a:r>
-            <a:endParaRPr lang="en-US" sz="3600" dirty="0"/>
-          </a:p>
-        </p:txBody>
-      </p:sp>
-      <p:sp>
-        <p:nvSpPr>
-          <p:cNvPr id="5" name="Text 2"/>
-          <p:cNvSpPr/>
-          <p:nvPr/>
-        </p:nvSpPr>
-        <p:spPr>
-          <a:xfrm>
-            <a:off x="5349240" y="1783080"/>
-            <a:ext cx="6522415" cy="4663440"/>
-          </a:xfrm>
-          <a:prstGeom prst="rect">
-            <a:avLst/>
-          </a:prstGeom>
-          <a:noFill/>
-          <a:ln/>
-        </p:spPr>
-        <p:txBody>
-          <a:bodyPr wrap="square" lIns="0" tIns="0" rIns="0" bIns="0" rtlCol="0" anchor="t"/>
-          <a:lstStyle/>
-          <a:p>
-            <a:pPr algn="l" indent="0" marL="0">
-              <a:spcAft>
-                <a:spcPts val="800"/>
-              </a:spcAft>
-              <a:buNone/>
-            </a:pPr>
-            <a:r>
-              <a:rPr lang="en-US" sz="4000" dirty="0">
-                <a:solidFill>
-                  <a:srgbClr val="111111"/>
-                </a:solidFill>
-                <a:latin typeface="Times New Roman" pitchFamily="34" charset="0"/>
-                <a:ea typeface="Times New Roman" pitchFamily="34" charset="-122"/>
-                <a:cs typeface="Times New Roman" pitchFamily="34" charset="-120"/>
-              </a:rPr>
-              <a:t>A sketch showing Doba (Chad) linked through Ngaoundéré (Adamawa) and Belabo to Kribi, with a title, key and north arrow.</a:t>
-            </a:r>
-            <a:endParaRPr lang="en-US" sz="4000" dirty="0"/>
-          </a:p>
-        </p:txBody>
-      </p:sp>
-      <p:sp>
-        <p:nvSpPr>
-          <p:cNvPr id="25" name="Slide Number Placeholder 0"/>
-          <p:cNvSpPr>
-            <a:spLocks noGrp="1"/>
-          </p:cNvSpPr>
-          <p:nvPr>
-            <p:ph type="sldNum" sz="quarter" idx="4294967295"/>
-          </p:nvPr>
-        </p:nvSpPr>
-        <p:spPr>
-          <a:xfrm>
-            <a:off x="27432" y="91440"/>
-            <a:ext cx="585216" cy="475488"/>
-          </a:xfrm>
-          <a:prstGeom prst="rect">
-            <a:avLst/>
-          </a:prstGeom>
-          <a:extLst>
-            <a:ext uri="{C572A759-6A51-4108-AA02-DFA0A04FC94B}">
-              <ma14:wrappingTextBoxFlag xmlns:ma14="http://schemas.microsoft.com/office/mac/drawingml/2011/main" val="0"/>
-            </a:ext>
-          </a:extLst>
-        </p:spPr>
-        <p:txBody>
-          <a:bodyPr/>
-          <a:lstStyle>
-            <a:lvl1pPr>
-              <a:defRPr sz="2000">
-                <a:solidFill>
-                  <a:srgbClr val="FFFFFF"/>
-                </a:solidFill>
-                <a:latin typeface="Calibri"/>
-                <a:ea typeface="Calibri"/>
-                <a:cs typeface="Calibri"/>
-              </a:defRPr>
-            </a:lvl1pPr>
-          </a:lstStyle>
-          <a:p>
-            <a:pPr algn="ctr"/>
-            <a:fld id="{F7021451-1387-4CA6-816F-3879F97B5CBC}" type="slidenum">
-              <a:rPr b="1" lang="en-US"/>
-              <a:t>5</a:t>
-            </a:fld>
-            <a:endParaRPr lang="en-US"/>
-          </a:p>
-        </p:txBody>
-      </p:sp>
-    </p:spTree>
-  </p:cSld>
-  <p:clrMapOvr>
-    <a:masterClrMapping/>
-  </p:clrMapOvr>
-</p:sld>
-</file>
-
-<file path=ppt/slides/slide50.xml><?xml version="1.0" encoding="utf-8"?>
-<p:sld xmlns:a="http://schemas.openxmlformats.org/drawingml/2006/main" xmlns:r="http://schemas.openxmlformats.org/officeDocument/2006/relationships" xmlns:p="http://schemas.openxmlformats.org/presentationml/2006/main">
-  <p:cSld name="Slide 50">
-    <p:spTree>
-      <p:nvGrpSpPr>
-        <p:cNvPr id="1" name=""/>
-        <p:cNvGrpSpPr/>
-        <p:nvPr/>
-      </p:nvGrpSpPr>
-      <p:grpSpPr>
-        <a:xfrm>
-          <a:off x="0" y="0"/>
-          <a:ext cx="0" cy="0"/>
-          <a:chOff x="0" y="0"/>
-          <a:chExt cx="0" cy="0"/>
-        </a:xfrm>
-      </p:grpSpPr>
-      <p:sp>
-        <p:nvSpPr>
-          <p:cNvPr id="2" name="Text 0"/>
-          <p:cNvSpPr/>
-          <p:nvPr/>
-        </p:nvSpPr>
-        <p:spPr>
-          <a:xfrm>
-            <a:off x="457200" y="713232"/>
-            <a:ext cx="11368735" cy="274320"/>
-          </a:xfrm>
-          <a:prstGeom prst="rect">
-            <a:avLst/>
-          </a:prstGeom>
-          <a:noFill/>
-          <a:ln/>
-        </p:spPr>
-        <p:txBody>
-          <a:bodyPr wrap="square" lIns="0" tIns="0" rIns="0" bIns="0" rtlCol="0" anchor="ctr"/>
-          <a:lstStyle/>
-          <a:p>
-            <a:pPr algn="r" indent="0" marL="0">
-              <a:buNone/>
-            </a:pPr>
-            <a:r>
-              <a:rPr lang="en-US" sz="1400" b="1" dirty="0">
-                <a:solidFill>
-                  <a:srgbClr val="1C3F6E"/>
-                </a:solidFill>
-                <a:latin typeface="Calibri" pitchFamily="34" charset="0"/>
-                <a:ea typeface="Calibri" pitchFamily="34" charset="-122"/>
-                <a:cs typeface="Calibri" pitchFamily="34" charset="-120"/>
-              </a:rPr>
               <a:t>LOGBOOK</a:t>
             </a:r>
             <a:endParaRPr lang="en-US" sz="1400" dirty="0"/>
@@ -19041,7 +19577,7 @@
       </p:sp>
       <p:graphicFrame>
         <p:nvGraphicFramePr>
-          <p:cNvPr id="51" name="Table 0"/>
+          <p:cNvPr id="52" name="Table 0"/>
           <p:cNvGraphicFramePr>
             <a:graphicFrameLocks noGrp="1"/>
           </p:cNvGraphicFramePr>
@@ -19151,7 +19687,7 @@
                           <a:ea typeface="Calibri" pitchFamily="34" charset="-122"/>
                           <a:cs typeface="Calibri" pitchFamily="34" charset="-120"/>
                         </a:rPr>
-                        <a:t>DEFINITIONS; Main Characteristics; Advantages and Disadvantages.</a:t>
+                        <a:t>DEFINITIONS; Main Characteristics; Advantages; Disadvantages.</a:t>
                       </a:r>
                       <a:endParaRPr lang="en-US" sz="1600" dirty="0">
                         <a:latin typeface="Calibri" charset="0"/>
@@ -19801,331 +20337,6 @@
             <a:pPr algn="ctr"/>
             <a:fld id="{F7021451-1387-4CA6-816F-3879F97B5CBC}" type="slidenum">
               <a:rPr b="1" lang="en-US"/>
-              <a:t>50</a:t>
-            </a:fld>
-            <a:endParaRPr lang="en-US"/>
-          </a:p>
-        </p:txBody>
-      </p:sp>
-    </p:spTree>
-  </p:cSld>
-  <p:clrMapOvr>
-    <a:masterClrMapping/>
-  </p:clrMapOvr>
-</p:sld>
-</file>
-
-<file path=ppt/slides/slide51.xml><?xml version="1.0" encoding="utf-8"?>
-<p:sld xmlns:a="http://schemas.openxmlformats.org/drawingml/2006/main" xmlns:r="http://schemas.openxmlformats.org/officeDocument/2006/relationships" xmlns:p="http://schemas.openxmlformats.org/presentationml/2006/main">
-  <p:cSld name="Slide 51">
-    <p:spTree>
-      <p:nvGrpSpPr>
-        <p:cNvPr id="1" name=""/>
-        <p:cNvGrpSpPr/>
-        <p:nvPr/>
-      </p:nvGrpSpPr>
-      <p:grpSpPr>
-        <a:xfrm>
-          <a:off x="0" y="0"/>
-          <a:ext cx="0" cy="0"/>
-          <a:chOff x="0" y="0"/>
-          <a:chExt cx="0" cy="0"/>
-        </a:xfrm>
-      </p:grpSpPr>
-      <p:sp>
-        <p:nvSpPr>
-          <p:cNvPr id="2" name="Text 0"/>
-          <p:cNvSpPr/>
-          <p:nvPr/>
-        </p:nvSpPr>
-        <p:spPr>
-          <a:xfrm>
-            <a:off x="457200" y="713232"/>
-            <a:ext cx="11368735" cy="274320"/>
-          </a:xfrm>
-          <a:prstGeom prst="rect">
-            <a:avLst/>
-          </a:prstGeom>
-          <a:noFill/>
-          <a:ln/>
-        </p:spPr>
-        <p:txBody>
-          <a:bodyPr wrap="square" lIns="0" tIns="0" rIns="0" bIns="0" rtlCol="0" anchor="ctr"/>
-          <a:lstStyle/>
-          <a:p>
-            <a:pPr algn="r" indent="0" marL="0">
-              <a:buNone/>
-            </a:pPr>
-            <a:r>
-              <a:rPr lang="en-US" sz="1400" b="1" dirty="0">
-                <a:solidFill>
-                  <a:srgbClr val="1C3F6E"/>
-                </a:solidFill>
-                <a:latin typeface="Calibri" pitchFamily="34" charset="0"/>
-                <a:ea typeface="Calibri" pitchFamily="34" charset="-122"/>
-                <a:cs typeface="Calibri" pitchFamily="34" charset="-120"/>
-              </a:rPr>
-              <a:t>TEACHER'S NOTE</a:t>
-            </a:r>
-            <a:endParaRPr lang="en-US" sz="1400" dirty="0"/>
-          </a:p>
-        </p:txBody>
-      </p:sp>
-      <p:pic>
-        <p:nvPicPr>
-          <p:cNvPr id="3" name="Image 0" descr="/home/claude/f4/img/minesec_sheet.png">    </p:cNvPr>
-          <p:cNvPicPr>
-            <a:picLocks noChangeAspect="1"/>
-          </p:cNvPicPr>
-          <p:nvPr/>
-        </p:nvPicPr>
-        <p:blipFill>
-          <a:blip r:embed="rId1"/>
-          <a:stretch>
-            <a:fillRect/>
-          </a:stretch>
-        </p:blipFill>
-        <p:spPr>
-          <a:xfrm>
-            <a:off x="0" y="658368"/>
-            <a:ext cx="5120640" cy="5833872"/>
-          </a:xfrm>
-          <a:prstGeom prst="rect">
-            <a:avLst/>
-          </a:prstGeom>
-        </p:spPr>
-      </p:pic>
-      <p:sp>
-        <p:nvSpPr>
-          <p:cNvPr id="4" name="Text 1"/>
-          <p:cNvSpPr/>
-          <p:nvPr/>
-        </p:nvSpPr>
-        <p:spPr>
-          <a:xfrm>
-            <a:off x="5349240" y="1005840"/>
-            <a:ext cx="6522415" cy="731520"/>
-          </a:xfrm>
-          <a:prstGeom prst="rect">
-            <a:avLst/>
-          </a:prstGeom>
-          <a:noFill/>
-          <a:ln/>
-        </p:spPr>
-        <p:txBody>
-          <a:bodyPr wrap="square" lIns="0" tIns="0" rIns="0" bIns="0" rtlCol="0" anchor="ctr">
-            <a:normAutofit/>
-          </a:bodyPr>
-          <a:lstStyle/>
-          <a:p>
-            <a:pPr algn="ctr" indent="0" marL="0">
-              <a:buNone/>
-            </a:pPr>
-            <a:r>
-              <a:rPr lang="en-US" sz="3600" b="1" dirty="0">
-                <a:solidFill>
-                  <a:srgbClr val="990011"/>
-                </a:solidFill>
-                <a:latin typeface="Times New Roman" pitchFamily="34" charset="0"/>
-                <a:ea typeface="Times New Roman" pitchFamily="34" charset="-122"/>
-                <a:cs typeface="Times New Roman" pitchFamily="34" charset="-120"/>
-              </a:rPr>
-              <a:t>Teacher's Note</a:t>
-            </a:r>
-            <a:endParaRPr lang="en-US" sz="3600" dirty="0"/>
-          </a:p>
-        </p:txBody>
-      </p:sp>
-      <p:sp>
-        <p:nvSpPr>
-          <p:cNvPr id="5" name="Text 2"/>
-          <p:cNvSpPr/>
-          <p:nvPr/>
-        </p:nvSpPr>
-        <p:spPr>
-          <a:xfrm>
-            <a:off x="5349240" y="1783080"/>
-            <a:ext cx="6522415" cy="4663440"/>
-          </a:xfrm>
-          <a:prstGeom prst="rect">
-            <a:avLst/>
-          </a:prstGeom>
-          <a:noFill/>
-          <a:ln/>
-        </p:spPr>
-        <p:txBody>
-          <a:bodyPr wrap="square" lIns="0" tIns="0" rIns="0" bIns="0" rtlCol="0" anchor="t"/>
-          <a:lstStyle/>
-          <a:p>
-            <a:pPr algn="l" marL="342900" indent="-342900">
-              <a:spcAft>
-                <a:spcPts val="800"/>
-              </a:spcAft>
-              <a:buSzPct val="100000"/>
-              <a:buChar char="•"/>
-            </a:pPr>
-            <a:r>
-              <a:rPr lang="en-US" sz="2000" dirty="0">
-                <a:solidFill>
-                  <a:srgbClr val="111111"/>
-                </a:solidFill>
-                <a:latin typeface="Calibri" pitchFamily="34" charset="0"/>
-                <a:ea typeface="Calibri" pitchFamily="34" charset="-122"/>
-                <a:cs typeface="Calibri" pitchFamily="34" charset="-120"/>
-              </a:rPr>
-              <a:t>Timing: Homework correction, plan, objectives 8 min | Recall, situation, action 10 min | 5 activities 30 min | Board summary (copying) 30 min | Evaluation, remediation 10 min | Homework, next lesson 5 min | Logbook 7 min</a:t>
-            </a:r>
-            <a:endParaRPr lang="en-US" sz="2000" dirty="0"/>
-          </a:p>
-          <a:p>
-            <a:pPr algn="l" marL="342900" indent="-342900">
-              <a:spcAft>
-                <a:spcPts val="800"/>
-              </a:spcAft>
-              <a:buSzPct val="100000"/>
-              <a:buChar char="•"/>
-            </a:pPr>
-            <a:r>
-              <a:rPr lang="en-US" sz="2000" dirty="0">
-                <a:solidFill>
-                  <a:srgbClr val="111111"/>
-                </a:solidFill>
-                <a:latin typeface="Calibri" pitchFamily="34" charset="0"/>
-                <a:ea typeface="Calibri" pitchFamily="34" charset="-122"/>
-                <a:cs typeface="Calibri" pitchFamily="34" charset="-120"/>
-              </a:rPr>
-              <a:t>Without the projector (Activity 1): discuss.</a:t>
-            </a:r>
-            <a:endParaRPr lang="en-US" sz="2000" dirty="0"/>
-          </a:p>
-          <a:p>
-            <a:pPr algn="l" marL="342900" indent="-342900">
-              <a:spcAft>
-                <a:spcPts val="800"/>
-              </a:spcAft>
-              <a:buSzPct val="100000"/>
-              <a:buChar char="•"/>
-            </a:pPr>
-            <a:r>
-              <a:rPr lang="en-US" sz="2000" dirty="0">
-                <a:solidFill>
-                  <a:srgbClr val="111111"/>
-                </a:solidFill>
-                <a:latin typeface="Calibri" pitchFamily="34" charset="0"/>
-                <a:ea typeface="Calibri" pitchFamily="34" charset="-122"/>
-                <a:cs typeface="Calibri" pitchFamily="34" charset="-120"/>
-              </a:rPr>
-              <a:t>Without the projector (Activity 2): list.</a:t>
-            </a:r>
-            <a:endParaRPr lang="en-US" sz="2000" dirty="0"/>
-          </a:p>
-          <a:p>
-            <a:pPr algn="l" marL="342900" indent="-342900">
-              <a:spcAft>
-                <a:spcPts val="800"/>
-              </a:spcAft>
-              <a:buSzPct val="100000"/>
-              <a:buChar char="•"/>
-            </a:pPr>
-            <a:r>
-              <a:rPr lang="en-US" sz="2000" dirty="0">
-                <a:solidFill>
-                  <a:srgbClr val="111111"/>
-                </a:solidFill>
-                <a:latin typeface="Calibri" pitchFamily="34" charset="0"/>
-                <a:ea typeface="Calibri" pitchFamily="34" charset="-122"/>
-                <a:cs typeface="Calibri" pitchFamily="34" charset="-120"/>
-              </a:rPr>
-              <a:t>Without the projector (Activity 3): discuss.</a:t>
-            </a:r>
-            <a:endParaRPr lang="en-US" sz="2000" dirty="0"/>
-          </a:p>
-          <a:p>
-            <a:pPr algn="l" marL="342900" indent="-342900">
-              <a:spcAft>
-                <a:spcPts val="800"/>
-              </a:spcAft>
-              <a:buSzPct val="100000"/>
-              <a:buChar char="•"/>
-            </a:pPr>
-            <a:r>
-              <a:rPr lang="en-US" sz="2000" dirty="0">
-                <a:solidFill>
-                  <a:srgbClr val="111111"/>
-                </a:solidFill>
-                <a:latin typeface="Calibri" pitchFamily="34" charset="0"/>
-                <a:ea typeface="Calibri" pitchFamily="34" charset="-122"/>
-                <a:cs typeface="Calibri" pitchFamily="34" charset="-120"/>
-              </a:rPr>
-              <a:t>Without the projector (Activity 4): list.</a:t>
-            </a:r>
-            <a:endParaRPr lang="en-US" sz="2000" dirty="0"/>
-          </a:p>
-          <a:p>
-            <a:pPr algn="l" marL="342900" indent="-342900">
-              <a:spcAft>
-                <a:spcPts val="800"/>
-              </a:spcAft>
-              <a:buSzPct val="100000"/>
-              <a:buChar char="•"/>
-            </a:pPr>
-            <a:r>
-              <a:rPr lang="en-US" sz="2000" dirty="0">
-                <a:solidFill>
-                  <a:srgbClr val="111111"/>
-                </a:solidFill>
-                <a:latin typeface="Calibri" pitchFamily="34" charset="0"/>
-                <a:ea typeface="Calibri" pitchFamily="34" charset="-122"/>
-                <a:cs typeface="Calibri" pitchFamily="34" charset="-120"/>
-              </a:rPr>
-              <a:t>Without the projector (Activity 5): list.</a:t>
-            </a:r>
-            <a:endParaRPr lang="en-US" sz="2000" dirty="0"/>
-          </a:p>
-        </p:txBody>
-      </p:sp>
-      <p:sp>
-        <p:nvSpPr>
-          <p:cNvPr id="25" name="Slide Number Placeholder 0"/>
-          <p:cNvSpPr>
-            <a:spLocks noGrp="1"/>
-          </p:cNvSpPr>
-          <p:nvPr>
-            <p:ph type="sldNum" sz="quarter" idx="4294967295"/>
-          </p:nvPr>
-        </p:nvSpPr>
-        <p:spPr>
-          <a:xfrm>
-            <a:off x="27432" y="91440"/>
-            <a:ext cx="585216" cy="475488"/>
-          </a:xfrm>
-          <a:prstGeom prst="rect">
-            <a:avLst/>
-          </a:prstGeom>
-          <a:extLst>
-            <a:ext uri="{C572A759-6A51-4108-AA02-DFA0A04FC94B}">
-              <ma14:wrappingTextBoxFlag xmlns:ma14="http://schemas.microsoft.com/office/mac/drawingml/2011/main" val="0"/>
-            </a:ext>
-          </a:extLst>
-        </p:spPr>
-        <p:txBody>
-          <a:bodyPr/>
-          <a:lstStyle>
-            <a:lvl1pPr>
-              <a:defRPr sz="2000">
-                <a:solidFill>
-                  <a:srgbClr val="FFFFFF"/>
-                </a:solidFill>
-                <a:latin typeface="Calibri"/>
-                <a:ea typeface="Calibri"/>
-                <a:cs typeface="Calibri"/>
-              </a:defRPr>
-            </a:lvl1pPr>
-          </a:lstStyle>
-          <a:p>
-            <a:pPr algn="ctr"/>
-            <a:fld id="{F7021451-1387-4CA6-816F-3879F97B5CBC}" type="slidenum">
-              <a:rPr b="1" lang="en-US"/>
               <a:t>51</a:t>
             </a:fld>
             <a:endParaRPr lang="en-US"/>
@@ -20190,7 +20401,7 @@
                 <a:ea typeface="Calibri" pitchFamily="34" charset="-122"/>
                 <a:cs typeface="Calibri" pitchFamily="34" charset="-120"/>
               </a:rPr>
-              <a:t>REFERENCES</a:t>
+              <a:t>TEACHER'S NOTE</a:t>
             </a:r>
             <a:endParaRPr lang="en-US" sz="1400" dirty="0"/>
           </a:p>
@@ -20255,7 +20466,7 @@
                 <a:ea typeface="Times New Roman" pitchFamily="34" charset="-122"/>
                 <a:cs typeface="Times New Roman" pitchFamily="34" charset="-120"/>
               </a:rPr>
-              <a:t>References</a:t>
+              <a:t>Teacher's Note</a:t>
             </a:r>
             <a:endParaRPr lang="en-US" sz="3600" dirty="0"/>
           </a:p>
@@ -20290,7 +20501,7 @@
               <a:buChar char="•"/>
             </a:pPr>
             <a:r>
-              <a:rPr lang="en-US" sz="1800" dirty="0">
+              <a:rPr lang="en-US" sz="2000" dirty="0">
                 <a:solidFill>
                   <a:srgbClr val="111111"/>
                 </a:solidFill>
@@ -20298,9 +20509,9 @@
                 <a:ea typeface="Calibri" pitchFamily="34" charset="-122"/>
                 <a:cs typeface="Calibri" pitchFamily="34" charset="-120"/>
               </a:rPr>
-              <a:t>Geography Syllabus, Forms I–V, MINESEC (2023) — Form 5, Module I: Management of Manufacturing and Tertiary Activities.</a:t>
-            </a:r>
-            <a:endParaRPr lang="en-US" sz="1800" dirty="0"/>
+              <a:t>Timing: Homework correction, plan, objectives 8 min | Recall, situation, action 10 min | 5 activities 30 min | Board summary (copying) 30 min | Evaluation, remediation 10 min | Homework, next lesson 5 min | Logbook 7 min</a:t>
+            </a:r>
+            <a:endParaRPr lang="en-US" sz="2000" dirty="0"/>
           </a:p>
           <a:p>
             <a:pPr algn="l" marL="342900" indent="-342900">
@@ -20311,7 +20522,7 @@
               <a:buChar char="•"/>
             </a:pPr>
             <a:r>
-              <a:rPr lang="en-US" sz="1800" dirty="0">
+              <a:rPr lang="en-US" sz="2000" dirty="0">
                 <a:solidFill>
                   <a:srgbClr val="111111"/>
                 </a:solidFill>
@@ -20319,9 +20530,9 @@
                 <a:ea typeface="Calibri" pitchFamily="34" charset="-122"/>
                 <a:cs typeface="Calibri" pitchFamily="34" charset="-120"/>
               </a:rPr>
-              <a:t>Photo, Activity 2: “Container Ships @ Port of Oakland” by jdnx, CC BY 2.0, via Flickr (https://www.flickr.com/photos/21442511@N08/3464243881)</a:t>
-            </a:r>
-            <a:endParaRPr lang="en-US" sz="1800" dirty="0"/>
+              <a:t>Without the projector (Activity 1): discuss.</a:t>
+            </a:r>
+            <a:endParaRPr lang="en-US" sz="2000" dirty="0"/>
           </a:p>
           <a:p>
             <a:pPr algn="l" marL="342900" indent="-342900">
@@ -20332,7 +20543,7 @@
               <a:buChar char="•"/>
             </a:pPr>
             <a:r>
-              <a:rPr lang="en-US" sz="1800" dirty="0">
+              <a:rPr lang="en-US" sz="2000" dirty="0">
                 <a:solidFill>
                   <a:srgbClr val="111111"/>
                 </a:solidFill>
@@ -20340,9 +20551,72 @@
                 <a:ea typeface="Calibri" pitchFamily="34" charset="-122"/>
                 <a:cs typeface="Calibri" pitchFamily="34" charset="-120"/>
               </a:rPr>
-              <a:t>Diagrams and animations: drawn for this lesson (Geography Department).</a:t>
-            </a:r>
-            <a:endParaRPr lang="en-US" sz="1800" dirty="0"/>
+              <a:t>Without the projector (Activity 2): list.</a:t>
+            </a:r>
+            <a:endParaRPr lang="en-US" sz="2000" dirty="0"/>
+          </a:p>
+          <a:p>
+            <a:pPr algn="l" marL="342900" indent="-342900">
+              <a:spcAft>
+                <a:spcPts val="800"/>
+              </a:spcAft>
+              <a:buSzPct val="100000"/>
+              <a:buChar char="•"/>
+            </a:pPr>
+            <a:r>
+              <a:rPr lang="en-US" sz="2000" dirty="0">
+                <a:solidFill>
+                  <a:srgbClr val="111111"/>
+                </a:solidFill>
+                <a:latin typeface="Calibri" pitchFamily="34" charset="0"/>
+                <a:ea typeface="Calibri" pitchFamily="34" charset="-122"/>
+                <a:cs typeface="Calibri" pitchFamily="34" charset="-120"/>
+              </a:rPr>
+              <a:t>Without the projector (Activity 3): discuss.</a:t>
+            </a:r>
+            <a:endParaRPr lang="en-US" sz="2000" dirty="0"/>
+          </a:p>
+          <a:p>
+            <a:pPr algn="l" marL="342900" indent="-342900">
+              <a:spcAft>
+                <a:spcPts val="800"/>
+              </a:spcAft>
+              <a:buSzPct val="100000"/>
+              <a:buChar char="•"/>
+            </a:pPr>
+            <a:r>
+              <a:rPr lang="en-US" sz="2000" dirty="0">
+                <a:solidFill>
+                  <a:srgbClr val="111111"/>
+                </a:solidFill>
+                <a:latin typeface="Calibri" pitchFamily="34" charset="0"/>
+                <a:ea typeface="Calibri" pitchFamily="34" charset="-122"/>
+                <a:cs typeface="Calibri" pitchFamily="34" charset="-120"/>
+              </a:rPr>
+              <a:t>Without the projector (Activity 4): list.</a:t>
+            </a:r>
+            <a:endParaRPr lang="en-US" sz="2000" dirty="0"/>
+          </a:p>
+          <a:p>
+            <a:pPr algn="l" marL="342900" indent="-342900">
+              <a:spcAft>
+                <a:spcPts val="800"/>
+              </a:spcAft>
+              <a:buSzPct val="100000"/>
+              <a:buChar char="•"/>
+            </a:pPr>
+            <a:r>
+              <a:rPr lang="en-US" sz="2000" dirty="0">
+                <a:solidFill>
+                  <a:srgbClr val="111111"/>
+                </a:solidFill>
+                <a:latin typeface="Calibri" pitchFamily="34" charset="0"/>
+                <a:ea typeface="Calibri" pitchFamily="34" charset="-122"/>
+                <a:cs typeface="Calibri" pitchFamily="34" charset="-120"/>
+              </a:rPr>
+              <a:t>Without the projector (Activity 5): list.</a:t>
+            </a:r>
+            <a:endParaRPr lang="en-US" sz="2000" dirty="0"/>
           </a:p>
         </p:txBody>
       </p:sp>
@@ -20389,6 +20663,268 @@
             <a:fld id="{F7021451-1387-4CA6-816F-3879F97B5CBC}" type="slidenum">
               <a:rPr b="1" lang="en-US"/>
               <a:t>52</a:t>
+            </a:fld>
+            <a:endParaRPr lang="en-US"/>
+          </a:p>
+        </p:txBody>
+      </p:sp>
+    </p:spTree>
+  </p:cSld>
+  <p:clrMapOvr>
+    <a:masterClrMapping/>
+  </p:clrMapOvr>
+</p:sld>
+</file>
+
+<file path=ppt/slides/slide53.xml><?xml version="1.0" encoding="utf-8"?>
+<p:sld xmlns:a="http://schemas.openxmlformats.org/drawingml/2006/main" xmlns:r="http://schemas.openxmlformats.org/officeDocument/2006/relationships" xmlns:p="http://schemas.openxmlformats.org/presentationml/2006/main">
+  <p:cSld name="Slide 53">
+    <p:spTree>
+      <p:nvGrpSpPr>
+        <p:cNvPr id="1" name=""/>
+        <p:cNvGrpSpPr/>
+        <p:nvPr/>
+      </p:nvGrpSpPr>
+      <p:grpSpPr>
+        <a:xfrm>
+          <a:off x="0" y="0"/>
+          <a:ext cx="0" cy="0"/>
+          <a:chOff x="0" y="0"/>
+          <a:chExt cx="0" cy="0"/>
+        </a:xfrm>
+      </p:grpSpPr>
+      <p:sp>
+        <p:nvSpPr>
+          <p:cNvPr id="2" name="Text 0"/>
+          <p:cNvSpPr/>
+          <p:nvPr/>
+        </p:nvSpPr>
+        <p:spPr>
+          <a:xfrm>
+            <a:off x="457200" y="713232"/>
+            <a:ext cx="11368735" cy="274320"/>
+          </a:xfrm>
+          <a:prstGeom prst="rect">
+            <a:avLst/>
+          </a:prstGeom>
+          <a:noFill/>
+          <a:ln/>
+        </p:spPr>
+        <p:txBody>
+          <a:bodyPr wrap="square" lIns="0" tIns="0" rIns="0" bIns="0" rtlCol="0" anchor="ctr"/>
+          <a:lstStyle/>
+          <a:p>
+            <a:pPr algn="r" indent="0" marL="0">
+              <a:buNone/>
+            </a:pPr>
+            <a:r>
+              <a:rPr lang="en-US" sz="1400" b="1" dirty="0">
+                <a:solidFill>
+                  <a:srgbClr val="1C3F6E"/>
+                </a:solidFill>
+                <a:latin typeface="Calibri" pitchFamily="34" charset="0"/>
+                <a:ea typeface="Calibri" pitchFamily="34" charset="-122"/>
+                <a:cs typeface="Calibri" pitchFamily="34" charset="-120"/>
+              </a:rPr>
+              <a:t>REFERENCES</a:t>
+            </a:r>
+            <a:endParaRPr lang="en-US" sz="1400" dirty="0"/>
+          </a:p>
+        </p:txBody>
+      </p:sp>
+      <p:pic>
+        <p:nvPicPr>
+          <p:cNvPr id="3" name="Image 0" descr="/home/claude/f4/img/minesec_sheet.png">    </p:cNvPr>
+          <p:cNvPicPr>
+            <a:picLocks noChangeAspect="1"/>
+          </p:cNvPicPr>
+          <p:nvPr/>
+        </p:nvPicPr>
+        <p:blipFill>
+          <a:blip r:embed="rId1"/>
+          <a:stretch>
+            <a:fillRect/>
+          </a:stretch>
+        </p:blipFill>
+        <p:spPr>
+          <a:xfrm>
+            <a:off x="0" y="658368"/>
+            <a:ext cx="5120640" cy="5833872"/>
+          </a:xfrm>
+          <a:prstGeom prst="rect">
+            <a:avLst/>
+          </a:prstGeom>
+        </p:spPr>
+      </p:pic>
+      <p:sp>
+        <p:nvSpPr>
+          <p:cNvPr id="4" name="Text 1"/>
+          <p:cNvSpPr/>
+          <p:nvPr/>
+        </p:nvSpPr>
+        <p:spPr>
+          <a:xfrm>
+            <a:off x="5349240" y="1005840"/>
+            <a:ext cx="6522415" cy="731520"/>
+          </a:xfrm>
+          <a:prstGeom prst="rect">
+            <a:avLst/>
+          </a:prstGeom>
+          <a:noFill/>
+          <a:ln/>
+        </p:spPr>
+        <p:txBody>
+          <a:bodyPr wrap="square" lIns="0" tIns="0" rIns="0" bIns="0" rtlCol="0" anchor="ctr">
+            <a:normAutofit/>
+          </a:bodyPr>
+          <a:lstStyle/>
+          <a:p>
+            <a:pPr algn="ctr" indent="0" marL="0">
+              <a:buNone/>
+            </a:pPr>
+            <a:r>
+              <a:rPr lang="en-US" sz="3600" b="1" dirty="0">
+                <a:solidFill>
+                  <a:srgbClr val="990011"/>
+                </a:solidFill>
+                <a:latin typeface="Times New Roman" pitchFamily="34" charset="0"/>
+                <a:ea typeface="Times New Roman" pitchFamily="34" charset="-122"/>
+                <a:cs typeface="Times New Roman" pitchFamily="34" charset="-120"/>
+              </a:rPr>
+              <a:t>References</a:t>
+            </a:r>
+            <a:endParaRPr lang="en-US" sz="3600" dirty="0"/>
+          </a:p>
+        </p:txBody>
+      </p:sp>
+      <p:sp>
+        <p:nvSpPr>
+          <p:cNvPr id="5" name="Text 2"/>
+          <p:cNvSpPr/>
+          <p:nvPr/>
+        </p:nvSpPr>
+        <p:spPr>
+          <a:xfrm>
+            <a:off x="5349240" y="1783080"/>
+            <a:ext cx="6522415" cy="4663440"/>
+          </a:xfrm>
+          <a:prstGeom prst="rect">
+            <a:avLst/>
+          </a:prstGeom>
+          <a:noFill/>
+          <a:ln/>
+        </p:spPr>
+        <p:txBody>
+          <a:bodyPr wrap="square" lIns="0" tIns="0" rIns="0" bIns="0" rtlCol="0" anchor="t"/>
+          <a:lstStyle/>
+          <a:p>
+            <a:pPr algn="l" marL="342900" indent="-342900">
+              <a:spcAft>
+                <a:spcPts val="800"/>
+              </a:spcAft>
+              <a:buSzPct val="100000"/>
+              <a:buChar char="•"/>
+            </a:pPr>
+            <a:r>
+              <a:rPr lang="en-US" sz="1800" dirty="0">
+                <a:solidFill>
+                  <a:srgbClr val="111111"/>
+                </a:solidFill>
+                <a:latin typeface="Calibri" pitchFamily="34" charset="0"/>
+                <a:ea typeface="Calibri" pitchFamily="34" charset="-122"/>
+                <a:cs typeface="Calibri" pitchFamily="34" charset="-120"/>
+              </a:rPr>
+              <a:t>Geography Syllabus, Forms I–V, MINESEC (2023) — Form 5, Module I: Management of Manufacturing and Tertiary Activities.</a:t>
+            </a:r>
+            <a:endParaRPr lang="en-US" sz="1800" dirty="0"/>
+          </a:p>
+          <a:p>
+            <a:pPr algn="l" marL="342900" indent="-342900">
+              <a:spcAft>
+                <a:spcPts val="800"/>
+              </a:spcAft>
+              <a:buSzPct val="100000"/>
+              <a:buChar char="•"/>
+            </a:pPr>
+            <a:r>
+              <a:rPr lang="en-US" sz="1800" dirty="0">
+                <a:solidFill>
+                  <a:srgbClr val="111111"/>
+                </a:solidFill>
+                <a:latin typeface="Calibri" pitchFamily="34" charset="0"/>
+                <a:ea typeface="Calibri" pitchFamily="34" charset="-122"/>
+                <a:cs typeface="Calibri" pitchFamily="34" charset="-120"/>
+              </a:rPr>
+              <a:t>Photo, Activity 2: “Container Ships @ Port of Oakland” by jdnx, CC BY 2.0, via Flickr (https://www.flickr.com/photos/21442511@N08/3464243881)</a:t>
+            </a:r>
+            <a:endParaRPr lang="en-US" sz="1800" dirty="0"/>
+          </a:p>
+          <a:p>
+            <a:pPr algn="l" marL="342900" indent="-342900">
+              <a:spcAft>
+                <a:spcPts val="800"/>
+              </a:spcAft>
+              <a:buSzPct val="100000"/>
+              <a:buChar char="•"/>
+            </a:pPr>
+            <a:r>
+              <a:rPr lang="en-US" sz="1800" dirty="0">
+                <a:solidFill>
+                  <a:srgbClr val="111111"/>
+                </a:solidFill>
+                <a:latin typeface="Calibri" pitchFamily="34" charset="0"/>
+                <a:ea typeface="Calibri" pitchFamily="34" charset="-122"/>
+                <a:cs typeface="Calibri" pitchFamily="34" charset="-120"/>
+              </a:rPr>
+              <a:t>Diagrams and animations: drawn for this lesson (Geography Department).</a:t>
+            </a:r>
+            <a:endParaRPr lang="en-US" sz="1800" dirty="0"/>
+          </a:p>
+        </p:txBody>
+      </p:sp>
+      <p:sp>
+        <p:nvSpPr>
+          <p:cNvPr id="25" name="Slide Number Placeholder 0"/>
+          <p:cNvSpPr>
+            <a:spLocks noGrp="1"/>
+          </p:cNvSpPr>
+          <p:nvPr>
+            <p:ph type="sldNum" sz="quarter" idx="4294967295"/>
+          </p:nvPr>
+        </p:nvSpPr>
+        <p:spPr>
+          <a:xfrm>
+            <a:off x="27432" y="91440"/>
+            <a:ext cx="585216" cy="475488"/>
+          </a:xfrm>
+          <a:prstGeom prst="rect">
+            <a:avLst/>
+          </a:prstGeom>
+          <a:extLst>
+            <a:ext uri="{C572A759-6A51-4108-AA02-DFA0A04FC94B}">
+              <ma14:wrappingTextBoxFlag xmlns:ma14="http://schemas.microsoft.com/office/mac/drawingml/2011/main" val="0"/>
+            </a:ext>
+          </a:extLst>
+        </p:spPr>
+        <p:txBody>
+          <a:bodyPr/>
+          <a:lstStyle>
+            <a:lvl1pPr>
+              <a:defRPr sz="2000">
+                <a:solidFill>
+                  <a:srgbClr val="FFFFFF"/>
+                </a:solidFill>
+                <a:latin typeface="Calibri"/>
+                <a:ea typeface="Calibri"/>
+                <a:cs typeface="Calibri"/>
+              </a:defRPr>
+            </a:lvl1pPr>
+          </a:lstStyle>
+          <a:p>
+            <a:pPr algn="ctr"/>
+            <a:fld id="{F7021451-1387-4CA6-816F-3879F97B5CBC}" type="slidenum">
+              <a:rPr b="1" lang="en-US"/>
+              <a:t>53</a:t>
             </a:fld>
             <a:endParaRPr lang="en-US"/>
           </a:p>
